--- a/AIA_Architecte_Intelligence_Artificielle/Bloc_3_Pipeline_IA/final_presentation/overall_architecture/Architecture_Fraud_Detection.pptx
+++ b/AIA_Architecte_Intelligence_Artificielle/Bloc_3_Pipeline_IA/final_presentation/overall_architecture/Architecture_Fraud_Detection.pptx
@@ -6,7 +6,9 @@
   </p:sldMasterIdLst>
   <p:sldIdLst>
     <p:sldId id="256" r:id="rId2"/>
-    <p:sldId id="257" r:id="rId3"/>
+    <p:sldId id="259" r:id="rId3"/>
+    <p:sldId id="258" r:id="rId4"/>
+    <p:sldId id="257" r:id="rId5"/>
   </p:sldIdLst>
   <p:sldSz cx="12192000" cy="6858000"/>
   <p:notesSz cx="6858000" cy="9144000"/>
@@ -260,7 +262,7 @@
           <a:p>
             <a:fld id="{1B006B2C-3CAE-4EA5-9F5D-D2B76FE68327}" type="datetimeFigureOut">
               <a:rPr lang="fr-FR" smtClean="0"/>
-              <a:t>19/05/2025</a:t>
+              <a:t>25/09/2025</a:t>
             </a:fld>
             <a:endParaRPr lang="fr-FR"/>
           </a:p>
@@ -458,7 +460,7 @@
           <a:p>
             <a:fld id="{1B006B2C-3CAE-4EA5-9F5D-D2B76FE68327}" type="datetimeFigureOut">
               <a:rPr lang="fr-FR" smtClean="0"/>
-              <a:t>19/05/2025</a:t>
+              <a:t>25/09/2025</a:t>
             </a:fld>
             <a:endParaRPr lang="fr-FR"/>
           </a:p>
@@ -666,7 +668,7 @@
           <a:p>
             <a:fld id="{1B006B2C-3CAE-4EA5-9F5D-D2B76FE68327}" type="datetimeFigureOut">
               <a:rPr lang="fr-FR" smtClean="0"/>
-              <a:t>19/05/2025</a:t>
+              <a:t>25/09/2025</a:t>
             </a:fld>
             <a:endParaRPr lang="fr-FR"/>
           </a:p>
@@ -864,7 +866,7 @@
           <a:p>
             <a:fld id="{1B006B2C-3CAE-4EA5-9F5D-D2B76FE68327}" type="datetimeFigureOut">
               <a:rPr lang="fr-FR" smtClean="0"/>
-              <a:t>19/05/2025</a:t>
+              <a:t>25/09/2025</a:t>
             </a:fld>
             <a:endParaRPr lang="fr-FR"/>
           </a:p>
@@ -1139,7 +1141,7 @@
           <a:p>
             <a:fld id="{1B006B2C-3CAE-4EA5-9F5D-D2B76FE68327}" type="datetimeFigureOut">
               <a:rPr lang="fr-FR" smtClean="0"/>
-              <a:t>19/05/2025</a:t>
+              <a:t>25/09/2025</a:t>
             </a:fld>
             <a:endParaRPr lang="fr-FR"/>
           </a:p>
@@ -1404,7 +1406,7 @@
           <a:p>
             <a:fld id="{1B006B2C-3CAE-4EA5-9F5D-D2B76FE68327}" type="datetimeFigureOut">
               <a:rPr lang="fr-FR" smtClean="0"/>
-              <a:t>19/05/2025</a:t>
+              <a:t>25/09/2025</a:t>
             </a:fld>
             <a:endParaRPr lang="fr-FR"/>
           </a:p>
@@ -1816,7 +1818,7 @@
           <a:p>
             <a:fld id="{1B006B2C-3CAE-4EA5-9F5D-D2B76FE68327}" type="datetimeFigureOut">
               <a:rPr lang="fr-FR" smtClean="0"/>
-              <a:t>19/05/2025</a:t>
+              <a:t>25/09/2025</a:t>
             </a:fld>
             <a:endParaRPr lang="fr-FR"/>
           </a:p>
@@ -1957,7 +1959,7 @@
           <a:p>
             <a:fld id="{1B006B2C-3CAE-4EA5-9F5D-D2B76FE68327}" type="datetimeFigureOut">
               <a:rPr lang="fr-FR" smtClean="0"/>
-              <a:t>19/05/2025</a:t>
+              <a:t>25/09/2025</a:t>
             </a:fld>
             <a:endParaRPr lang="fr-FR"/>
           </a:p>
@@ -2070,7 +2072,7 @@
           <a:p>
             <a:fld id="{1B006B2C-3CAE-4EA5-9F5D-D2B76FE68327}" type="datetimeFigureOut">
               <a:rPr lang="fr-FR" smtClean="0"/>
-              <a:t>19/05/2025</a:t>
+              <a:t>25/09/2025</a:t>
             </a:fld>
             <a:endParaRPr lang="fr-FR"/>
           </a:p>
@@ -2381,7 +2383,7 @@
           <a:p>
             <a:fld id="{1B006B2C-3CAE-4EA5-9F5D-D2B76FE68327}" type="datetimeFigureOut">
               <a:rPr lang="fr-FR" smtClean="0"/>
-              <a:t>19/05/2025</a:t>
+              <a:t>25/09/2025</a:t>
             </a:fld>
             <a:endParaRPr lang="fr-FR"/>
           </a:p>
@@ -2669,7 +2671,7 @@
           <a:p>
             <a:fld id="{1B006B2C-3CAE-4EA5-9F5D-D2B76FE68327}" type="datetimeFigureOut">
               <a:rPr lang="fr-FR" smtClean="0"/>
-              <a:t>19/05/2025</a:t>
+              <a:t>25/09/2025</a:t>
             </a:fld>
             <a:endParaRPr lang="fr-FR"/>
           </a:p>
@@ -2910,7 +2912,7 @@
           <a:p>
             <a:fld id="{1B006B2C-3CAE-4EA5-9F5D-D2B76FE68327}" type="datetimeFigureOut">
               <a:rPr lang="fr-FR" smtClean="0"/>
-              <a:t>19/05/2025</a:t>
+              <a:t>25/09/2025</a:t>
             </a:fld>
             <a:endParaRPr lang="fr-FR"/>
           </a:p>
@@ -4676,7 +4678,7 @@
         </p:nvCxnSpPr>
         <p:spPr>
           <a:xfrm>
-            <a:off x="5045533" y="5148274"/>
+            <a:off x="5012535" y="5146207"/>
             <a:ext cx="1931412" cy="311238"/>
           </a:xfrm>
           <a:prstGeom prst="straightConnector1">
@@ -5173,6 +5175,104 @@
               <a:t>deployment</a:t>
             </a:r>
             <a:endParaRPr lang="fr-FR" sz="1100" b="1" i="1" dirty="0"/>
+          </a:p>
+        </p:txBody>
+      </p:sp>
+      <p:sp>
+        <p:nvSpPr>
+          <p:cNvPr id="2" name="ZoneTexte 1">
+            <a:extLst>
+              <a:ext uri="{FF2B5EF4-FFF2-40B4-BE49-F238E27FC236}">
+                <a16:creationId xmlns:a16="http://schemas.microsoft.com/office/drawing/2014/main" id="{FD047879-94FA-D467-F6E0-0CCBB616CAFA}"/>
+              </a:ext>
+            </a:extLst>
+          </p:cNvPr>
+          <p:cNvSpPr txBox="1"/>
+          <p:nvPr/>
+        </p:nvSpPr>
+        <p:spPr>
+          <a:xfrm>
+            <a:off x="1409995" y="3483802"/>
+            <a:ext cx="921615" cy="276999"/>
+          </a:xfrm>
+          <a:prstGeom prst="rect">
+            <a:avLst/>
+          </a:prstGeom>
+          <a:noFill/>
+        </p:spPr>
+        <p:txBody>
+          <a:bodyPr wrap="square" rtlCol="0">
+            <a:spAutoFit/>
+          </a:bodyPr>
+          <a:lstStyle/>
+          <a:p>
+            <a:r>
+              <a:rPr lang="fr-FR" sz="1200" b="1" dirty="0" err="1">
+                <a:solidFill>
+                  <a:schemeClr val="accent1"/>
+                </a:solidFill>
+                <a:latin typeface="Aptos" panose="020B0004020202020204" pitchFamily="34" charset="0"/>
+              </a:rPr>
+              <a:t>Step</a:t>
+            </a:r>
+            <a:r>
+              <a:rPr lang="fr-FR" sz="1200" b="1" dirty="0">
+                <a:solidFill>
+                  <a:schemeClr val="accent1"/>
+                </a:solidFill>
+                <a:latin typeface="Aptos" panose="020B0004020202020204" pitchFamily="34" charset="0"/>
+              </a:rPr>
+              <a:t> 1</a:t>
+            </a:r>
+          </a:p>
+        </p:txBody>
+      </p:sp>
+      <p:sp>
+        <p:nvSpPr>
+          <p:cNvPr id="3" name="ZoneTexte 2">
+            <a:extLst>
+              <a:ext uri="{FF2B5EF4-FFF2-40B4-BE49-F238E27FC236}">
+                <a16:creationId xmlns:a16="http://schemas.microsoft.com/office/drawing/2014/main" id="{00E93CF8-3A91-594F-0E61-B555DE08093F}"/>
+              </a:ext>
+            </a:extLst>
+          </p:cNvPr>
+          <p:cNvSpPr txBox="1"/>
+          <p:nvPr/>
+        </p:nvSpPr>
+        <p:spPr>
+          <a:xfrm>
+            <a:off x="5464141" y="5321012"/>
+            <a:ext cx="921615" cy="276999"/>
+          </a:xfrm>
+          <a:prstGeom prst="rect">
+            <a:avLst/>
+          </a:prstGeom>
+          <a:noFill/>
+        </p:spPr>
+        <p:txBody>
+          <a:bodyPr wrap="square" rtlCol="0">
+            <a:spAutoFit/>
+          </a:bodyPr>
+          <a:lstStyle/>
+          <a:p>
+            <a:r>
+              <a:rPr lang="fr-FR" sz="1200" b="1" dirty="0" err="1">
+                <a:solidFill>
+                  <a:schemeClr val="accent1"/>
+                </a:solidFill>
+                <a:latin typeface="Aptos" panose="020B0004020202020204" pitchFamily="34" charset="0"/>
+              </a:rPr>
+              <a:t>Step</a:t>
+            </a:r>
+            <a:r>
+              <a:rPr lang="fr-FR" sz="1200" b="1" dirty="0">
+                <a:solidFill>
+                  <a:schemeClr val="accent1"/>
+                </a:solidFill>
+                <a:latin typeface="Aptos" panose="020B0004020202020204" pitchFamily="34" charset="0"/>
+              </a:rPr>
+              <a:t> 1</a:t>
+            </a:r>
           </a:p>
         </p:txBody>
       </p:sp>
@@ -5190,6 +5290,2676 @@
 </file>
 
 <file path=ppt/slides/slide2.xml><?xml version="1.0" encoding="utf-8"?>
+<p:sld xmlns:a="http://schemas.openxmlformats.org/drawingml/2006/main" xmlns:r="http://schemas.openxmlformats.org/officeDocument/2006/relationships" xmlns:p="http://schemas.openxmlformats.org/presentationml/2006/main">
+  <p:cSld>
+    <p:spTree>
+      <p:nvGrpSpPr>
+        <p:cNvPr id="1" name=""/>
+        <p:cNvGrpSpPr/>
+        <p:nvPr/>
+      </p:nvGrpSpPr>
+      <p:grpSpPr>
+        <a:xfrm>
+          <a:off x="0" y="0"/>
+          <a:ext cx="0" cy="0"/>
+          <a:chOff x="0" y="0"/>
+          <a:chExt cx="0" cy="0"/>
+        </a:xfrm>
+      </p:grpSpPr>
+      <p:pic>
+        <p:nvPicPr>
+          <p:cNvPr id="4" name="Picture 32" descr="Database Icons - Free SVG &amp; PNG Database Images - Noun Project">
+            <a:extLst>
+              <a:ext uri="{FF2B5EF4-FFF2-40B4-BE49-F238E27FC236}">
+                <a16:creationId xmlns:a16="http://schemas.microsoft.com/office/drawing/2014/main" id="{09831F48-820D-F5EE-C0F5-9021D78A6E50}"/>
+              </a:ext>
+            </a:extLst>
+          </p:cNvPr>
+          <p:cNvPicPr>
+            <a:picLocks noChangeAspect="1" noChangeArrowheads="1"/>
+          </p:cNvPicPr>
+          <p:nvPr/>
+        </p:nvPicPr>
+        <p:blipFill>
+          <a:blip r:embed="rId2">
+            <a:extLst>
+              <a:ext uri="{28A0092B-C50C-407E-A947-70E740481C1C}">
+                <a14:useLocalDpi xmlns:a14="http://schemas.microsoft.com/office/drawing/2010/main" val="0"/>
+              </a:ext>
+            </a:extLst>
+          </a:blip>
+          <a:srcRect/>
+          <a:stretch>
+            <a:fillRect/>
+          </a:stretch>
+        </p:blipFill>
+        <p:spPr bwMode="auto">
+          <a:xfrm>
+            <a:off x="701784" y="794334"/>
+            <a:ext cx="986116" cy="986116"/>
+          </a:xfrm>
+          <a:prstGeom prst="rect">
+            <a:avLst/>
+          </a:prstGeom>
+          <a:noFill/>
+          <a:extLst>
+            <a:ext uri="{909E8E84-426E-40DD-AFC4-6F175D3DCCD1}">
+              <a14:hiddenFill xmlns:a14="http://schemas.microsoft.com/office/drawing/2010/main">
+                <a:solidFill>
+                  <a:srgbClr val="FFFFFF"/>
+                </a:solidFill>
+              </a14:hiddenFill>
+            </a:ext>
+          </a:extLst>
+        </p:spPr>
+      </p:pic>
+      <p:pic>
+        <p:nvPicPr>
+          <p:cNvPr id="5" name="Picture 14" descr="MLflow — a modern MLOps tool for data project collaboration | by Hong  Nguyen | SFU Professional Computer Science | Medium">
+            <a:extLst>
+              <a:ext uri="{FF2B5EF4-FFF2-40B4-BE49-F238E27FC236}">
+                <a16:creationId xmlns:a16="http://schemas.microsoft.com/office/drawing/2014/main" id="{9EBACE7B-6FF1-E52F-BC74-C33C22FA62ED}"/>
+              </a:ext>
+            </a:extLst>
+          </p:cNvPr>
+          <p:cNvPicPr>
+            <a:picLocks noChangeAspect="1" noChangeArrowheads="1"/>
+          </p:cNvPicPr>
+          <p:nvPr/>
+        </p:nvPicPr>
+        <p:blipFill>
+          <a:blip r:embed="rId3">
+            <a:extLst>
+              <a:ext uri="{28A0092B-C50C-407E-A947-70E740481C1C}">
+                <a14:useLocalDpi xmlns:a14="http://schemas.microsoft.com/office/drawing/2010/main" val="0"/>
+              </a:ext>
+            </a:extLst>
+          </a:blip>
+          <a:srcRect/>
+          <a:stretch>
+            <a:fillRect/>
+          </a:stretch>
+        </p:blipFill>
+        <p:spPr bwMode="auto">
+          <a:xfrm>
+            <a:off x="4370276" y="794334"/>
+            <a:ext cx="1242732" cy="480146"/>
+          </a:xfrm>
+          <a:prstGeom prst="rect">
+            <a:avLst/>
+          </a:prstGeom>
+          <a:noFill/>
+          <a:extLst>
+            <a:ext uri="{909E8E84-426E-40DD-AFC4-6F175D3DCCD1}">
+              <a14:hiddenFill xmlns:a14="http://schemas.microsoft.com/office/drawing/2010/main">
+                <a:solidFill>
+                  <a:srgbClr val="FFFFFF"/>
+                </a:solidFill>
+              </a14:hiddenFill>
+            </a:ext>
+          </a:extLst>
+        </p:spPr>
+      </p:pic>
+      <p:pic>
+        <p:nvPicPr>
+          <p:cNvPr id="7" name="Picture 12">
+            <a:extLst>
+              <a:ext uri="{FF2B5EF4-FFF2-40B4-BE49-F238E27FC236}">
+                <a16:creationId xmlns:a16="http://schemas.microsoft.com/office/drawing/2014/main" id="{762E9762-5AFE-62B3-06A9-449B149E6352}"/>
+              </a:ext>
+            </a:extLst>
+          </p:cNvPr>
+          <p:cNvPicPr>
+            <a:picLocks noChangeAspect="1" noChangeArrowheads="1"/>
+          </p:cNvPicPr>
+          <p:nvPr/>
+        </p:nvPicPr>
+        <p:blipFill>
+          <a:blip r:embed="rId4">
+            <a:extLst>
+              <a:ext uri="{28A0092B-C50C-407E-A947-70E740481C1C}">
+                <a14:useLocalDpi xmlns:a14="http://schemas.microsoft.com/office/drawing/2010/main" val="0"/>
+              </a:ext>
+            </a:extLst>
+          </a:blip>
+          <a:srcRect/>
+          <a:stretch>
+            <a:fillRect/>
+          </a:stretch>
+        </p:blipFill>
+        <p:spPr bwMode="auto">
+          <a:xfrm>
+            <a:off x="2772678" y="555514"/>
+            <a:ext cx="1134187" cy="611841"/>
+          </a:xfrm>
+          <a:prstGeom prst="rect">
+            <a:avLst/>
+          </a:prstGeom>
+          <a:noFill/>
+          <a:extLst>
+            <a:ext uri="{909E8E84-426E-40DD-AFC4-6F175D3DCCD1}">
+              <a14:hiddenFill xmlns:a14="http://schemas.microsoft.com/office/drawing/2010/main">
+                <a:solidFill>
+                  <a:srgbClr val="FFFFFF"/>
+                </a:solidFill>
+              </a14:hiddenFill>
+            </a:ext>
+          </a:extLst>
+        </p:spPr>
+      </p:pic>
+      <p:pic>
+        <p:nvPicPr>
+          <p:cNvPr id="2050" name="Picture 2" descr="Understanding XGBoost &amp; it's growing popularity among the ML community | by  Deep Borkar | Analytics Vidhya | Medium">
+            <a:extLst>
+              <a:ext uri="{FF2B5EF4-FFF2-40B4-BE49-F238E27FC236}">
+                <a16:creationId xmlns:a16="http://schemas.microsoft.com/office/drawing/2014/main" id="{7A8B1E19-E9CD-86FF-83BB-D71317EB2418}"/>
+              </a:ext>
+            </a:extLst>
+          </p:cNvPr>
+          <p:cNvPicPr>
+            <a:picLocks noChangeAspect="1" noChangeArrowheads="1"/>
+          </p:cNvPicPr>
+          <p:nvPr/>
+        </p:nvPicPr>
+        <p:blipFill>
+          <a:blip r:embed="rId5">
+            <a:extLst>
+              <a:ext uri="{28A0092B-C50C-407E-A947-70E740481C1C}">
+                <a14:useLocalDpi xmlns:a14="http://schemas.microsoft.com/office/drawing/2010/main" val="0"/>
+              </a:ext>
+            </a:extLst>
+          </a:blip>
+          <a:srcRect/>
+          <a:stretch>
+            <a:fillRect/>
+          </a:stretch>
+        </p:blipFill>
+        <p:spPr bwMode="auto">
+          <a:xfrm>
+            <a:off x="3273527" y="1176181"/>
+            <a:ext cx="1645024" cy="913902"/>
+          </a:xfrm>
+          <a:prstGeom prst="rect">
+            <a:avLst/>
+          </a:prstGeom>
+          <a:noFill/>
+          <a:extLst>
+            <a:ext uri="{909E8E84-426E-40DD-AFC4-6F175D3DCCD1}">
+              <a14:hiddenFill xmlns:a14="http://schemas.microsoft.com/office/drawing/2010/main">
+                <a:solidFill>
+                  <a:srgbClr val="FFFFFF"/>
+                </a:solidFill>
+              </a14:hiddenFill>
+            </a:ext>
+          </a:extLst>
+        </p:spPr>
+      </p:pic>
+      <p:pic>
+        <p:nvPicPr>
+          <p:cNvPr id="8" name="Picture 52">
+            <a:extLst>
+              <a:ext uri="{FF2B5EF4-FFF2-40B4-BE49-F238E27FC236}">
+                <a16:creationId xmlns:a16="http://schemas.microsoft.com/office/drawing/2014/main" id="{5769B0FD-1D98-BB6F-27AB-A4B053B1AF67}"/>
+              </a:ext>
+            </a:extLst>
+          </p:cNvPr>
+          <p:cNvPicPr>
+            <a:picLocks noChangeAspect="1" noChangeArrowheads="1"/>
+          </p:cNvPicPr>
+          <p:nvPr/>
+        </p:nvPicPr>
+        <p:blipFill>
+          <a:blip r:embed="rId6">
+            <a:extLst>
+              <a:ext uri="{28A0092B-C50C-407E-A947-70E740481C1C}">
+                <a14:useLocalDpi xmlns:a14="http://schemas.microsoft.com/office/drawing/2010/main" val="0"/>
+              </a:ext>
+            </a:extLst>
+          </a:blip>
+          <a:srcRect/>
+          <a:stretch>
+            <a:fillRect/>
+          </a:stretch>
+        </p:blipFill>
+        <p:spPr bwMode="auto">
+          <a:xfrm>
+            <a:off x="6517036" y="756461"/>
+            <a:ext cx="817841" cy="978352"/>
+          </a:xfrm>
+          <a:prstGeom prst="rect">
+            <a:avLst/>
+          </a:prstGeom>
+          <a:noFill/>
+          <a:extLst>
+            <a:ext uri="{909E8E84-426E-40DD-AFC4-6F175D3DCCD1}">
+              <a14:hiddenFill xmlns:a14="http://schemas.microsoft.com/office/drawing/2010/main">
+                <a:solidFill>
+                  <a:srgbClr val="FFFFFF"/>
+                </a:solidFill>
+              </a14:hiddenFill>
+            </a:ext>
+          </a:extLst>
+        </p:spPr>
+      </p:pic>
+      <p:pic>
+        <p:nvPicPr>
+          <p:cNvPr id="9" name="Picture 2" descr="FastAPI">
+            <a:extLst>
+              <a:ext uri="{FF2B5EF4-FFF2-40B4-BE49-F238E27FC236}">
+                <a16:creationId xmlns:a16="http://schemas.microsoft.com/office/drawing/2014/main" id="{CA2ACF8B-BD40-5988-3C34-2D8B65EDC28F}"/>
+              </a:ext>
+            </a:extLst>
+          </p:cNvPr>
+          <p:cNvPicPr>
+            <a:picLocks noChangeAspect="1" noChangeArrowheads="1"/>
+          </p:cNvPicPr>
+          <p:nvPr/>
+        </p:nvPicPr>
+        <p:blipFill>
+          <a:blip r:embed="rId7">
+            <a:extLst>
+              <a:ext uri="{28A0092B-C50C-407E-A947-70E740481C1C}">
+                <a14:useLocalDpi xmlns:a14="http://schemas.microsoft.com/office/drawing/2010/main" val="0"/>
+              </a:ext>
+            </a:extLst>
+          </a:blip>
+          <a:srcRect/>
+          <a:stretch>
+            <a:fillRect/>
+          </a:stretch>
+        </p:blipFill>
+        <p:spPr bwMode="auto">
+          <a:xfrm>
+            <a:off x="9675205" y="913077"/>
+            <a:ext cx="2041665" cy="735717"/>
+          </a:xfrm>
+          <a:prstGeom prst="rect">
+            <a:avLst/>
+          </a:prstGeom>
+          <a:noFill/>
+          <a:extLst>
+            <a:ext uri="{909E8E84-426E-40DD-AFC4-6F175D3DCCD1}">
+              <a14:hiddenFill xmlns:a14="http://schemas.microsoft.com/office/drawing/2010/main">
+                <a:solidFill>
+                  <a:srgbClr val="FFFFFF"/>
+                </a:solidFill>
+              </a14:hiddenFill>
+            </a:ext>
+          </a:extLst>
+        </p:spPr>
+      </p:pic>
+      <p:cxnSp>
+        <p:nvCxnSpPr>
+          <p:cNvPr id="10" name="Connecteur droit avec flèche 9">
+            <a:extLst>
+              <a:ext uri="{FF2B5EF4-FFF2-40B4-BE49-F238E27FC236}">
+                <a16:creationId xmlns:a16="http://schemas.microsoft.com/office/drawing/2014/main" id="{E846A177-047F-CFB4-AFE6-F90A4B45D42D}"/>
+              </a:ext>
+            </a:extLst>
+          </p:cNvPr>
+          <p:cNvCxnSpPr>
+            <a:cxnSpLocks/>
+          </p:cNvCxnSpPr>
+          <p:nvPr/>
+        </p:nvCxnSpPr>
+        <p:spPr>
+          <a:xfrm flipV="1">
+            <a:off x="1722733" y="1274480"/>
+            <a:ext cx="4382231" cy="12912"/>
+          </a:xfrm>
+          <a:prstGeom prst="straightConnector1">
+            <a:avLst/>
+          </a:prstGeom>
+          <a:ln>
+            <a:tailEnd type="triangle"/>
+          </a:ln>
+        </p:spPr>
+        <p:style>
+          <a:lnRef idx="2">
+            <a:schemeClr val="accent1"/>
+          </a:lnRef>
+          <a:fillRef idx="0">
+            <a:schemeClr val="accent1"/>
+          </a:fillRef>
+          <a:effectRef idx="1">
+            <a:schemeClr val="accent1"/>
+          </a:effectRef>
+          <a:fontRef idx="minor">
+            <a:schemeClr val="tx1"/>
+          </a:fontRef>
+        </p:style>
+      </p:cxnSp>
+      <p:cxnSp>
+        <p:nvCxnSpPr>
+          <p:cNvPr id="12" name="Connecteur droit avec flèche 11">
+            <a:extLst>
+              <a:ext uri="{FF2B5EF4-FFF2-40B4-BE49-F238E27FC236}">
+                <a16:creationId xmlns:a16="http://schemas.microsoft.com/office/drawing/2014/main" id="{8AF38276-4A09-DC3A-1E35-3104DD60313D}"/>
+              </a:ext>
+            </a:extLst>
+          </p:cNvPr>
+          <p:cNvCxnSpPr>
+            <a:cxnSpLocks/>
+            <a:endCxn id="9" idx="1"/>
+          </p:cNvCxnSpPr>
+          <p:nvPr/>
+        </p:nvCxnSpPr>
+        <p:spPr>
+          <a:xfrm>
+            <a:off x="7575176" y="1274480"/>
+            <a:ext cx="2100029" cy="6456"/>
+          </a:xfrm>
+          <a:prstGeom prst="straightConnector1">
+            <a:avLst/>
+          </a:prstGeom>
+          <a:ln>
+            <a:tailEnd type="triangle"/>
+          </a:ln>
+        </p:spPr>
+        <p:style>
+          <a:lnRef idx="2">
+            <a:schemeClr val="accent1"/>
+          </a:lnRef>
+          <a:fillRef idx="0">
+            <a:schemeClr val="accent1"/>
+          </a:fillRef>
+          <a:effectRef idx="1">
+            <a:schemeClr val="accent1"/>
+          </a:effectRef>
+          <a:fontRef idx="minor">
+            <a:schemeClr val="tx1"/>
+          </a:fontRef>
+        </p:style>
+      </p:cxnSp>
+      <p:pic>
+        <p:nvPicPr>
+          <p:cNvPr id="18" name="Picture 56">
+            <a:extLst>
+              <a:ext uri="{FF2B5EF4-FFF2-40B4-BE49-F238E27FC236}">
+                <a16:creationId xmlns:a16="http://schemas.microsoft.com/office/drawing/2014/main" id="{A1485606-E11F-7EFE-3356-579D9A0E4403}"/>
+              </a:ext>
+            </a:extLst>
+          </p:cNvPr>
+          <p:cNvPicPr>
+            <a:picLocks noChangeAspect="1" noChangeArrowheads="1"/>
+          </p:cNvPicPr>
+          <p:nvPr/>
+        </p:nvPicPr>
+        <p:blipFill>
+          <a:blip r:embed="rId8">
+            <a:extLst>
+              <a:ext uri="{28A0092B-C50C-407E-A947-70E740481C1C}">
+                <a14:useLocalDpi xmlns:a14="http://schemas.microsoft.com/office/drawing/2010/main" val="0"/>
+              </a:ext>
+            </a:extLst>
+          </a:blip>
+          <a:srcRect/>
+          <a:stretch>
+            <a:fillRect/>
+          </a:stretch>
+        </p:blipFill>
+        <p:spPr bwMode="auto">
+          <a:xfrm>
+            <a:off x="10025188" y="1469901"/>
+            <a:ext cx="1341697" cy="357786"/>
+          </a:xfrm>
+          <a:prstGeom prst="rect">
+            <a:avLst/>
+          </a:prstGeom>
+          <a:noFill/>
+          <a:extLst>
+            <a:ext uri="{909E8E84-426E-40DD-AFC4-6F175D3DCCD1}">
+              <a14:hiddenFill xmlns:a14="http://schemas.microsoft.com/office/drawing/2010/main">
+                <a:solidFill>
+                  <a:srgbClr val="FFFFFF"/>
+                </a:solidFill>
+              </a14:hiddenFill>
+            </a:ext>
+          </a:extLst>
+        </p:spPr>
+      </p:pic>
+      <p:pic>
+        <p:nvPicPr>
+          <p:cNvPr id="19" name="Picture 6" descr="Api - Icônes ui gratuites">
+            <a:extLst>
+              <a:ext uri="{FF2B5EF4-FFF2-40B4-BE49-F238E27FC236}">
+                <a16:creationId xmlns:a16="http://schemas.microsoft.com/office/drawing/2014/main" id="{184D638C-06A1-EC14-85F8-865853B6228D}"/>
+              </a:ext>
+            </a:extLst>
+          </p:cNvPr>
+          <p:cNvPicPr>
+            <a:picLocks noChangeAspect="1" noChangeArrowheads="1"/>
+          </p:cNvPicPr>
+          <p:nvPr/>
+        </p:nvPicPr>
+        <p:blipFill>
+          <a:blip r:embed="rId9">
+            <a:extLst>
+              <a:ext uri="{28A0092B-C50C-407E-A947-70E740481C1C}">
+                <a14:useLocalDpi xmlns:a14="http://schemas.microsoft.com/office/drawing/2010/main" val="0"/>
+              </a:ext>
+            </a:extLst>
+          </a:blip>
+          <a:srcRect/>
+          <a:stretch>
+            <a:fillRect/>
+          </a:stretch>
+        </p:blipFill>
+        <p:spPr bwMode="auto">
+          <a:xfrm>
+            <a:off x="3686006" y="2411509"/>
+            <a:ext cx="986115" cy="986115"/>
+          </a:xfrm>
+          <a:prstGeom prst="rect">
+            <a:avLst/>
+          </a:prstGeom>
+          <a:noFill/>
+          <a:extLst>
+            <a:ext uri="{909E8E84-426E-40DD-AFC4-6F175D3DCCD1}">
+              <a14:hiddenFill xmlns:a14="http://schemas.microsoft.com/office/drawing/2010/main">
+                <a:solidFill>
+                  <a:srgbClr val="FFFFFF"/>
+                </a:solidFill>
+              </a14:hiddenFill>
+            </a:ext>
+          </a:extLst>
+        </p:spPr>
+      </p:pic>
+      <p:pic>
+        <p:nvPicPr>
+          <p:cNvPr id="20" name="Picture 4" descr="Why we Invested in Neon - M12">
+            <a:extLst>
+              <a:ext uri="{FF2B5EF4-FFF2-40B4-BE49-F238E27FC236}">
+                <a16:creationId xmlns:a16="http://schemas.microsoft.com/office/drawing/2014/main" id="{22658CC4-7125-CE9F-8650-79EBE81A8CB1}"/>
+              </a:ext>
+            </a:extLst>
+          </p:cNvPr>
+          <p:cNvPicPr>
+            <a:picLocks noChangeAspect="1" noChangeArrowheads="1"/>
+          </p:cNvPicPr>
+          <p:nvPr/>
+        </p:nvPicPr>
+        <p:blipFill>
+          <a:blip r:embed="rId10">
+            <a:extLst>
+              <a:ext uri="{28A0092B-C50C-407E-A947-70E740481C1C}">
+                <a14:useLocalDpi xmlns:a14="http://schemas.microsoft.com/office/drawing/2010/main" val="0"/>
+              </a:ext>
+            </a:extLst>
+          </a:blip>
+          <a:srcRect/>
+          <a:stretch>
+            <a:fillRect/>
+          </a:stretch>
+        </p:blipFill>
+        <p:spPr bwMode="auto">
+          <a:xfrm>
+            <a:off x="7912830" y="2796479"/>
+            <a:ext cx="1165278" cy="494078"/>
+          </a:xfrm>
+          <a:prstGeom prst="rect">
+            <a:avLst/>
+          </a:prstGeom>
+          <a:noFill/>
+          <a:extLst>
+            <a:ext uri="{909E8E84-426E-40DD-AFC4-6F175D3DCCD1}">
+              <a14:hiddenFill xmlns:a14="http://schemas.microsoft.com/office/drawing/2010/main">
+                <a:solidFill>
+                  <a:srgbClr val="FFFFFF"/>
+                </a:solidFill>
+              </a14:hiddenFill>
+            </a:ext>
+          </a:extLst>
+        </p:spPr>
+      </p:pic>
+      <p:cxnSp>
+        <p:nvCxnSpPr>
+          <p:cNvPr id="21" name="Connecteur droit avec flèche 20">
+            <a:extLst>
+              <a:ext uri="{FF2B5EF4-FFF2-40B4-BE49-F238E27FC236}">
+                <a16:creationId xmlns:a16="http://schemas.microsoft.com/office/drawing/2014/main" id="{1E8AD010-1124-8067-4636-612302305280}"/>
+              </a:ext>
+            </a:extLst>
+          </p:cNvPr>
+          <p:cNvCxnSpPr>
+            <a:cxnSpLocks/>
+          </p:cNvCxnSpPr>
+          <p:nvPr/>
+        </p:nvCxnSpPr>
+        <p:spPr>
+          <a:xfrm flipV="1">
+            <a:off x="4860262" y="1780450"/>
+            <a:ext cx="1656774" cy="1275980"/>
+          </a:xfrm>
+          <a:prstGeom prst="straightConnector1">
+            <a:avLst/>
+          </a:prstGeom>
+          <a:ln>
+            <a:tailEnd type="triangle"/>
+          </a:ln>
+        </p:spPr>
+        <p:style>
+          <a:lnRef idx="2">
+            <a:schemeClr val="accent1"/>
+          </a:lnRef>
+          <a:fillRef idx="0">
+            <a:schemeClr val="accent1"/>
+          </a:fillRef>
+          <a:effectRef idx="1">
+            <a:schemeClr val="accent1"/>
+          </a:effectRef>
+          <a:fontRef idx="minor">
+            <a:schemeClr val="tx1"/>
+          </a:fontRef>
+        </p:style>
+      </p:cxnSp>
+      <p:cxnSp>
+        <p:nvCxnSpPr>
+          <p:cNvPr id="23" name="Connecteur droit avec flèche 22">
+            <a:extLst>
+              <a:ext uri="{FF2B5EF4-FFF2-40B4-BE49-F238E27FC236}">
+                <a16:creationId xmlns:a16="http://schemas.microsoft.com/office/drawing/2014/main" id="{18A38A99-2292-CFEF-3A9F-32F362C6BF6D}"/>
+              </a:ext>
+            </a:extLst>
+          </p:cNvPr>
+          <p:cNvCxnSpPr>
+            <a:cxnSpLocks/>
+          </p:cNvCxnSpPr>
+          <p:nvPr/>
+        </p:nvCxnSpPr>
+        <p:spPr>
+          <a:xfrm flipV="1">
+            <a:off x="4860262" y="3043518"/>
+            <a:ext cx="2867314" cy="25824"/>
+          </a:xfrm>
+          <a:prstGeom prst="straightConnector1">
+            <a:avLst/>
+          </a:prstGeom>
+          <a:ln>
+            <a:tailEnd type="triangle"/>
+          </a:ln>
+        </p:spPr>
+        <p:style>
+          <a:lnRef idx="2">
+            <a:schemeClr val="accent1"/>
+          </a:lnRef>
+          <a:fillRef idx="0">
+            <a:schemeClr val="accent1"/>
+          </a:fillRef>
+          <a:effectRef idx="1">
+            <a:schemeClr val="accent1"/>
+          </a:effectRef>
+          <a:fontRef idx="minor">
+            <a:schemeClr val="tx1"/>
+          </a:fontRef>
+        </p:style>
+      </p:cxnSp>
+      <p:cxnSp>
+        <p:nvCxnSpPr>
+          <p:cNvPr id="25" name="Connecteur droit avec flèche 24">
+            <a:extLst>
+              <a:ext uri="{FF2B5EF4-FFF2-40B4-BE49-F238E27FC236}">
+                <a16:creationId xmlns:a16="http://schemas.microsoft.com/office/drawing/2014/main" id="{96E873F0-192F-BADE-F405-9C4360C28FBC}"/>
+              </a:ext>
+            </a:extLst>
+          </p:cNvPr>
+          <p:cNvCxnSpPr>
+            <a:cxnSpLocks/>
+          </p:cNvCxnSpPr>
+          <p:nvPr/>
+        </p:nvCxnSpPr>
+        <p:spPr>
+          <a:xfrm>
+            <a:off x="6794537" y="1786906"/>
+            <a:ext cx="1004757" cy="994216"/>
+          </a:xfrm>
+          <a:prstGeom prst="straightConnector1">
+            <a:avLst/>
+          </a:prstGeom>
+          <a:ln>
+            <a:tailEnd type="triangle"/>
+          </a:ln>
+        </p:spPr>
+        <p:style>
+          <a:lnRef idx="2">
+            <a:schemeClr val="accent1"/>
+          </a:lnRef>
+          <a:fillRef idx="0">
+            <a:schemeClr val="accent1"/>
+          </a:fillRef>
+          <a:effectRef idx="1">
+            <a:schemeClr val="accent1"/>
+          </a:effectRef>
+          <a:fontRef idx="minor">
+            <a:schemeClr val="tx1"/>
+          </a:fontRef>
+        </p:style>
+      </p:cxnSp>
+    </p:spTree>
+    <p:extLst>
+      <p:ext uri="{BB962C8B-B14F-4D97-AF65-F5344CB8AC3E}">
+        <p14:creationId xmlns:p14="http://schemas.microsoft.com/office/powerpoint/2010/main" val="4125132148"/>
+      </p:ext>
+    </p:extLst>
+  </p:cSld>
+  <p:clrMapOvr>
+    <a:masterClrMapping/>
+  </p:clrMapOvr>
+</p:sld>
+</file>
+
+<file path=ppt/slides/slide3.xml><?xml version="1.0" encoding="utf-8"?>
+<p:sld xmlns:a="http://schemas.openxmlformats.org/drawingml/2006/main" xmlns:r="http://schemas.openxmlformats.org/officeDocument/2006/relationships" xmlns:p="http://schemas.openxmlformats.org/presentationml/2006/main">
+  <p:cSld>
+    <p:spTree>
+      <p:nvGrpSpPr>
+        <p:cNvPr id="1" name=""/>
+        <p:cNvGrpSpPr/>
+        <p:nvPr/>
+      </p:nvGrpSpPr>
+      <p:grpSpPr>
+        <a:xfrm>
+          <a:off x="0" y="0"/>
+          <a:ext cx="0" cy="0"/>
+          <a:chOff x="0" y="0"/>
+          <a:chExt cx="0" cy="0"/>
+        </a:xfrm>
+      </p:grpSpPr>
+      <p:sp>
+        <p:nvSpPr>
+          <p:cNvPr id="34" name="Rectangle : coins arrondis 33">
+            <a:extLst>
+              <a:ext uri="{FF2B5EF4-FFF2-40B4-BE49-F238E27FC236}">
+                <a16:creationId xmlns:a16="http://schemas.microsoft.com/office/drawing/2014/main" id="{19B64958-A94E-3082-E6A1-5BD49869E165}"/>
+              </a:ext>
+            </a:extLst>
+          </p:cNvPr>
+          <p:cNvSpPr/>
+          <p:nvPr/>
+        </p:nvSpPr>
+        <p:spPr>
+          <a:xfrm>
+            <a:off x="6096000" y="3510469"/>
+            <a:ext cx="7073900" cy="4196604"/>
+          </a:xfrm>
+          <a:prstGeom prst="roundRect">
+            <a:avLst/>
+          </a:prstGeom>
+          <a:solidFill>
+            <a:schemeClr val="accent2">
+              <a:lumMod val="20000"/>
+              <a:lumOff val="80000"/>
+            </a:schemeClr>
+          </a:solidFill>
+        </p:spPr>
+        <p:style>
+          <a:lnRef idx="2">
+            <a:schemeClr val="accent1">
+              <a:shade val="15000"/>
+            </a:schemeClr>
+          </a:lnRef>
+          <a:fillRef idx="1">
+            <a:schemeClr val="accent1"/>
+          </a:fillRef>
+          <a:effectRef idx="0">
+            <a:schemeClr val="accent1"/>
+          </a:effectRef>
+          <a:fontRef idx="minor">
+            <a:schemeClr val="lt1"/>
+          </a:fontRef>
+        </p:style>
+        <p:txBody>
+          <a:bodyPr rtlCol="0" anchor="ctr"/>
+          <a:lstStyle/>
+          <a:p>
+            <a:pPr algn="ctr"/>
+            <a:endParaRPr lang="fr-FR"/>
+          </a:p>
+        </p:txBody>
+      </p:sp>
+      <p:sp>
+        <p:nvSpPr>
+          <p:cNvPr id="32" name="Rectangle : coins arrondis 31">
+            <a:extLst>
+              <a:ext uri="{FF2B5EF4-FFF2-40B4-BE49-F238E27FC236}">
+                <a16:creationId xmlns:a16="http://schemas.microsoft.com/office/drawing/2014/main" id="{7D8C01F7-3320-A992-F50E-7DF88286AB39}"/>
+              </a:ext>
+            </a:extLst>
+          </p:cNvPr>
+          <p:cNvSpPr/>
+          <p:nvPr/>
+        </p:nvSpPr>
+        <p:spPr>
+          <a:xfrm>
+            <a:off x="-977900" y="3480363"/>
+            <a:ext cx="7073900" cy="4196604"/>
+          </a:xfrm>
+          <a:prstGeom prst="roundRect">
+            <a:avLst/>
+          </a:prstGeom>
+          <a:solidFill>
+            <a:schemeClr val="accent6">
+              <a:lumMod val="20000"/>
+              <a:lumOff val="80000"/>
+            </a:schemeClr>
+          </a:solidFill>
+        </p:spPr>
+        <p:style>
+          <a:lnRef idx="2">
+            <a:schemeClr val="accent1">
+              <a:shade val="15000"/>
+            </a:schemeClr>
+          </a:lnRef>
+          <a:fillRef idx="1">
+            <a:schemeClr val="accent1"/>
+          </a:fillRef>
+          <a:effectRef idx="0">
+            <a:schemeClr val="accent1"/>
+          </a:effectRef>
+          <a:fontRef idx="minor">
+            <a:schemeClr val="lt1"/>
+          </a:fontRef>
+        </p:style>
+        <p:txBody>
+          <a:bodyPr rtlCol="0" anchor="ctr"/>
+          <a:lstStyle/>
+          <a:p>
+            <a:pPr algn="ctr"/>
+            <a:endParaRPr lang="fr-FR"/>
+          </a:p>
+        </p:txBody>
+      </p:sp>
+      <p:sp>
+        <p:nvSpPr>
+          <p:cNvPr id="24" name="Ellipse 23">
+            <a:extLst>
+              <a:ext uri="{FF2B5EF4-FFF2-40B4-BE49-F238E27FC236}">
+                <a16:creationId xmlns:a16="http://schemas.microsoft.com/office/drawing/2014/main" id="{FBBF0187-3782-DD68-6886-37CAA740B228}"/>
+              </a:ext>
+            </a:extLst>
+          </p:cNvPr>
+          <p:cNvSpPr/>
+          <p:nvPr/>
+        </p:nvSpPr>
+        <p:spPr>
+          <a:xfrm>
+            <a:off x="4743272" y="2167834"/>
+            <a:ext cx="2927931" cy="2544900"/>
+          </a:xfrm>
+          <a:prstGeom prst="ellipse">
+            <a:avLst/>
+          </a:prstGeom>
+          <a:solidFill>
+            <a:schemeClr val="bg2">
+              <a:lumMod val="90000"/>
+            </a:schemeClr>
+          </a:solidFill>
+        </p:spPr>
+        <p:style>
+          <a:lnRef idx="2">
+            <a:schemeClr val="accent1">
+              <a:shade val="15000"/>
+            </a:schemeClr>
+          </a:lnRef>
+          <a:fillRef idx="1">
+            <a:schemeClr val="accent1"/>
+          </a:fillRef>
+          <a:effectRef idx="0">
+            <a:schemeClr val="accent1"/>
+          </a:effectRef>
+          <a:fontRef idx="minor">
+            <a:schemeClr val="lt1"/>
+          </a:fontRef>
+        </p:style>
+        <p:txBody>
+          <a:bodyPr rtlCol="0" anchor="ctr"/>
+          <a:lstStyle/>
+          <a:p>
+            <a:pPr algn="ctr"/>
+            <a:endParaRPr lang="fr-FR"/>
+          </a:p>
+        </p:txBody>
+      </p:sp>
+      <p:pic>
+        <p:nvPicPr>
+          <p:cNvPr id="1026" name="Picture 2">
+            <a:extLst>
+              <a:ext uri="{FF2B5EF4-FFF2-40B4-BE49-F238E27FC236}">
+                <a16:creationId xmlns:a16="http://schemas.microsoft.com/office/drawing/2014/main" id="{D1FCF6BC-7BFB-AD24-A4E0-CE84C4A3A2F8}"/>
+              </a:ext>
+            </a:extLst>
+          </p:cNvPr>
+          <p:cNvPicPr>
+            <a:picLocks noChangeAspect="1" noChangeArrowheads="1"/>
+          </p:cNvPicPr>
+          <p:nvPr/>
+        </p:nvPicPr>
+        <p:blipFill>
+          <a:blip r:embed="rId2">
+            <a:extLst>
+              <a:ext uri="{28A0092B-C50C-407E-A947-70E740481C1C}">
+                <a14:useLocalDpi xmlns:a14="http://schemas.microsoft.com/office/drawing/2010/main" val="0"/>
+              </a:ext>
+            </a:extLst>
+          </a:blip>
+          <a:srcRect/>
+          <a:stretch>
+            <a:fillRect/>
+          </a:stretch>
+        </p:blipFill>
+        <p:spPr bwMode="auto">
+          <a:xfrm>
+            <a:off x="5268629" y="3073209"/>
+            <a:ext cx="1898666" cy="734151"/>
+          </a:xfrm>
+          <a:prstGeom prst="rect">
+            <a:avLst/>
+          </a:prstGeom>
+          <a:noFill/>
+          <a:extLst>
+            <a:ext uri="{909E8E84-426E-40DD-AFC4-6F175D3DCCD1}">
+              <a14:hiddenFill xmlns:a14="http://schemas.microsoft.com/office/drawing/2010/main">
+                <a:solidFill>
+                  <a:srgbClr val="FFFFFF"/>
+                </a:solidFill>
+              </a14:hiddenFill>
+            </a:ext>
+          </a:extLst>
+        </p:spPr>
+      </p:pic>
+      <p:pic>
+        <p:nvPicPr>
+          <p:cNvPr id="1028" name="Picture 4" descr="Why we Invested in Neon - M12">
+            <a:extLst>
+              <a:ext uri="{FF2B5EF4-FFF2-40B4-BE49-F238E27FC236}">
+                <a16:creationId xmlns:a16="http://schemas.microsoft.com/office/drawing/2014/main" id="{FC354FBA-6247-189D-8F65-B7CFD3D64DEE}"/>
+              </a:ext>
+            </a:extLst>
+          </p:cNvPr>
+          <p:cNvPicPr>
+            <a:picLocks noChangeAspect="1" noChangeArrowheads="1"/>
+          </p:cNvPicPr>
+          <p:nvPr/>
+        </p:nvPicPr>
+        <p:blipFill>
+          <a:blip r:embed="rId3">
+            <a:extLst>
+              <a:ext uri="{28A0092B-C50C-407E-A947-70E740481C1C}">
+                <a14:useLocalDpi xmlns:a14="http://schemas.microsoft.com/office/drawing/2010/main" val="0"/>
+              </a:ext>
+            </a:extLst>
+          </a:blip>
+          <a:srcRect/>
+          <a:stretch>
+            <a:fillRect/>
+          </a:stretch>
+        </p:blipFill>
+        <p:spPr bwMode="auto">
+          <a:xfrm>
+            <a:off x="8684227" y="5156267"/>
+            <a:ext cx="1165278" cy="494078"/>
+          </a:xfrm>
+          <a:prstGeom prst="rect">
+            <a:avLst/>
+          </a:prstGeom>
+          <a:noFill/>
+          <a:extLst>
+            <a:ext uri="{909E8E84-426E-40DD-AFC4-6F175D3DCCD1}">
+              <a14:hiddenFill xmlns:a14="http://schemas.microsoft.com/office/drawing/2010/main">
+                <a:solidFill>
+                  <a:srgbClr val="FFFFFF"/>
+                </a:solidFill>
+              </a14:hiddenFill>
+            </a:ext>
+          </a:extLst>
+        </p:spPr>
+      </p:pic>
+      <p:pic>
+        <p:nvPicPr>
+          <p:cNvPr id="1030" name="Picture 6" descr="Api - Icônes ui gratuites">
+            <a:extLst>
+              <a:ext uri="{FF2B5EF4-FFF2-40B4-BE49-F238E27FC236}">
+                <a16:creationId xmlns:a16="http://schemas.microsoft.com/office/drawing/2014/main" id="{E0729101-BC7F-6237-F3B9-6B817300EFCA}"/>
+              </a:ext>
+            </a:extLst>
+          </p:cNvPr>
+          <p:cNvPicPr>
+            <a:picLocks noChangeAspect="1" noChangeArrowheads="1"/>
+          </p:cNvPicPr>
+          <p:nvPr/>
+        </p:nvPicPr>
+        <p:blipFill>
+          <a:blip r:embed="rId4">
+            <a:extLst>
+              <a:ext uri="{28A0092B-C50C-407E-A947-70E740481C1C}">
+                <a14:useLocalDpi xmlns:a14="http://schemas.microsoft.com/office/drawing/2010/main" val="0"/>
+              </a:ext>
+            </a:extLst>
+          </a:blip>
+          <a:srcRect/>
+          <a:stretch>
+            <a:fillRect/>
+          </a:stretch>
+        </p:blipFill>
+        <p:spPr bwMode="auto">
+          <a:xfrm>
+            <a:off x="2834862" y="1200737"/>
+            <a:ext cx="986115" cy="986115"/>
+          </a:xfrm>
+          <a:prstGeom prst="rect">
+            <a:avLst/>
+          </a:prstGeom>
+          <a:noFill/>
+          <a:extLst>
+            <a:ext uri="{909E8E84-426E-40DD-AFC4-6F175D3DCCD1}">
+              <a14:hiddenFill xmlns:a14="http://schemas.microsoft.com/office/drawing/2010/main">
+                <a:solidFill>
+                  <a:srgbClr val="FFFFFF"/>
+                </a:solidFill>
+              </a14:hiddenFill>
+            </a:ext>
+          </a:extLst>
+        </p:spPr>
+      </p:pic>
+      <p:pic>
+        <p:nvPicPr>
+          <p:cNvPr id="1036" name="Picture 12">
+            <a:extLst>
+              <a:ext uri="{FF2B5EF4-FFF2-40B4-BE49-F238E27FC236}">
+                <a16:creationId xmlns:a16="http://schemas.microsoft.com/office/drawing/2014/main" id="{C41A3D41-7F0F-4EE4-EB94-491C92911CBB}"/>
+              </a:ext>
+            </a:extLst>
+          </p:cNvPr>
+          <p:cNvPicPr>
+            <a:picLocks noChangeAspect="1" noChangeArrowheads="1"/>
+          </p:cNvPicPr>
+          <p:nvPr/>
+        </p:nvPicPr>
+        <p:blipFill>
+          <a:blip r:embed="rId5">
+            <a:extLst>
+              <a:ext uri="{28A0092B-C50C-407E-A947-70E740481C1C}">
+                <a14:useLocalDpi xmlns:a14="http://schemas.microsoft.com/office/drawing/2010/main" val="0"/>
+              </a:ext>
+            </a:extLst>
+          </a:blip>
+          <a:srcRect/>
+          <a:stretch>
+            <a:fillRect/>
+          </a:stretch>
+        </p:blipFill>
+        <p:spPr bwMode="auto">
+          <a:xfrm>
+            <a:off x="2719707" y="4120980"/>
+            <a:ext cx="1134187" cy="611841"/>
+          </a:xfrm>
+          <a:prstGeom prst="rect">
+            <a:avLst/>
+          </a:prstGeom>
+          <a:noFill/>
+          <a:extLst>
+            <a:ext uri="{909E8E84-426E-40DD-AFC4-6F175D3DCCD1}">
+              <a14:hiddenFill xmlns:a14="http://schemas.microsoft.com/office/drawing/2010/main">
+                <a:solidFill>
+                  <a:srgbClr val="FFFFFF"/>
+                </a:solidFill>
+              </a14:hiddenFill>
+            </a:ext>
+          </a:extLst>
+        </p:spPr>
+      </p:pic>
+      <p:pic>
+        <p:nvPicPr>
+          <p:cNvPr id="1038" name="Picture 14" descr="MLflow — a modern MLOps tool for data project collaboration | by Hong  Nguyen | SFU Professional Computer Science | Medium">
+            <a:extLst>
+              <a:ext uri="{FF2B5EF4-FFF2-40B4-BE49-F238E27FC236}">
+                <a16:creationId xmlns:a16="http://schemas.microsoft.com/office/drawing/2014/main" id="{D87E8C90-475C-B99C-8FE4-F8A325D63718}"/>
+              </a:ext>
+            </a:extLst>
+          </p:cNvPr>
+          <p:cNvPicPr>
+            <a:picLocks noChangeAspect="1" noChangeArrowheads="1"/>
+          </p:cNvPicPr>
+          <p:nvPr/>
+        </p:nvPicPr>
+        <p:blipFill>
+          <a:blip r:embed="rId6">
+            <a:extLst>
+              <a:ext uri="{28A0092B-C50C-407E-A947-70E740481C1C}">
+                <a14:useLocalDpi xmlns:a14="http://schemas.microsoft.com/office/drawing/2010/main" val="0"/>
+              </a:ext>
+            </a:extLst>
+          </a:blip>
+          <a:srcRect/>
+          <a:stretch>
+            <a:fillRect/>
+          </a:stretch>
+        </p:blipFill>
+        <p:spPr bwMode="auto">
+          <a:xfrm>
+            <a:off x="3548345" y="4781611"/>
+            <a:ext cx="1242732" cy="480146"/>
+          </a:xfrm>
+          <a:prstGeom prst="rect">
+            <a:avLst/>
+          </a:prstGeom>
+          <a:noFill/>
+          <a:extLst>
+            <a:ext uri="{909E8E84-426E-40DD-AFC4-6F175D3DCCD1}">
+              <a14:hiddenFill xmlns:a14="http://schemas.microsoft.com/office/drawing/2010/main">
+                <a:solidFill>
+                  <a:srgbClr val="FFFFFF"/>
+                </a:solidFill>
+              </a14:hiddenFill>
+            </a:ext>
+          </a:extLst>
+        </p:spPr>
+      </p:pic>
+      <p:pic>
+        <p:nvPicPr>
+          <p:cNvPr id="1046" name="Picture 22">
+            <a:extLst>
+              <a:ext uri="{FF2B5EF4-FFF2-40B4-BE49-F238E27FC236}">
+                <a16:creationId xmlns:a16="http://schemas.microsoft.com/office/drawing/2014/main" id="{C5DA6877-52A7-E732-DB07-822F811F7C3D}"/>
+              </a:ext>
+            </a:extLst>
+          </p:cNvPr>
+          <p:cNvPicPr>
+            <a:picLocks noChangeAspect="1" noChangeArrowheads="1"/>
+          </p:cNvPicPr>
+          <p:nvPr/>
+        </p:nvPicPr>
+        <p:blipFill>
+          <a:blip r:embed="rId7">
+            <a:extLst>
+              <a:ext uri="{28A0092B-C50C-407E-A947-70E740481C1C}">
+                <a14:useLocalDpi xmlns:a14="http://schemas.microsoft.com/office/drawing/2010/main" val="0"/>
+              </a:ext>
+            </a:extLst>
+          </a:blip>
+          <a:srcRect/>
+          <a:stretch>
+            <a:fillRect/>
+          </a:stretch>
+        </p:blipFill>
+        <p:spPr bwMode="auto">
+          <a:xfrm>
+            <a:off x="10540858" y="733830"/>
+            <a:ext cx="731388" cy="731388"/>
+          </a:xfrm>
+          <a:prstGeom prst="rect">
+            <a:avLst/>
+          </a:prstGeom>
+          <a:noFill/>
+          <a:extLst>
+            <a:ext uri="{909E8E84-426E-40DD-AFC4-6F175D3DCCD1}">
+              <a14:hiddenFill xmlns:a14="http://schemas.microsoft.com/office/drawing/2010/main">
+                <a:solidFill>
+                  <a:srgbClr val="FFFFFF"/>
+                </a:solidFill>
+              </a14:hiddenFill>
+            </a:ext>
+          </a:extLst>
+        </p:spPr>
+      </p:pic>
+      <p:pic>
+        <p:nvPicPr>
+          <p:cNvPr id="1048" name="Picture 24">
+            <a:extLst>
+              <a:ext uri="{FF2B5EF4-FFF2-40B4-BE49-F238E27FC236}">
+                <a16:creationId xmlns:a16="http://schemas.microsoft.com/office/drawing/2014/main" id="{679386F7-740E-1933-9FD7-25B4ED255601}"/>
+              </a:ext>
+            </a:extLst>
+          </p:cNvPr>
+          <p:cNvPicPr>
+            <a:picLocks noChangeAspect="1" noChangeArrowheads="1"/>
+          </p:cNvPicPr>
+          <p:nvPr/>
+        </p:nvPicPr>
+        <p:blipFill>
+          <a:blip r:embed="rId8">
+            <a:extLst>
+              <a:ext uri="{28A0092B-C50C-407E-A947-70E740481C1C}">
+                <a14:useLocalDpi xmlns:a14="http://schemas.microsoft.com/office/drawing/2010/main" val="0"/>
+              </a:ext>
+            </a:extLst>
+          </a:blip>
+          <a:srcRect/>
+          <a:stretch>
+            <a:fillRect/>
+          </a:stretch>
+        </p:blipFill>
+        <p:spPr bwMode="auto">
+          <a:xfrm>
+            <a:off x="10321742" y="2134433"/>
+            <a:ext cx="1250236" cy="731388"/>
+          </a:xfrm>
+          <a:prstGeom prst="rect">
+            <a:avLst/>
+          </a:prstGeom>
+          <a:noFill/>
+          <a:extLst>
+            <a:ext uri="{909E8E84-426E-40DD-AFC4-6F175D3DCCD1}">
+              <a14:hiddenFill xmlns:a14="http://schemas.microsoft.com/office/drawing/2010/main">
+                <a:solidFill>
+                  <a:srgbClr val="FFFFFF"/>
+                </a:solidFill>
+              </a14:hiddenFill>
+            </a:ext>
+          </a:extLst>
+        </p:spPr>
+      </p:pic>
+      <p:sp>
+        <p:nvSpPr>
+          <p:cNvPr id="5" name="ZoneTexte 4">
+            <a:extLst>
+              <a:ext uri="{FF2B5EF4-FFF2-40B4-BE49-F238E27FC236}">
+                <a16:creationId xmlns:a16="http://schemas.microsoft.com/office/drawing/2014/main" id="{A43DF3AC-3FC9-298E-2F4F-D19454F9CB1D}"/>
+              </a:ext>
+            </a:extLst>
+          </p:cNvPr>
+          <p:cNvSpPr txBox="1"/>
+          <p:nvPr/>
+        </p:nvSpPr>
+        <p:spPr>
+          <a:xfrm>
+            <a:off x="79769" y="1442362"/>
+            <a:ext cx="2446235" cy="261610"/>
+          </a:xfrm>
+          <a:prstGeom prst="rect">
+            <a:avLst/>
+          </a:prstGeom>
+          <a:noFill/>
+        </p:spPr>
+        <p:txBody>
+          <a:bodyPr wrap="square" rtlCol="0">
+            <a:spAutoFit/>
+          </a:bodyPr>
+          <a:lstStyle/>
+          <a:p>
+            <a:r>
+              <a:rPr lang="fr-FR" sz="1100" b="1" i="1" dirty="0" err="1"/>
+              <a:t>History</a:t>
+            </a:r>
+            <a:r>
+              <a:rPr lang="fr-FR" sz="1100" b="1" i="1" dirty="0"/>
+              <a:t> </a:t>
+            </a:r>
+            <a:r>
+              <a:rPr lang="fr-FR" sz="1100" b="1" i="1" dirty="0" err="1"/>
+              <a:t>database</a:t>
+            </a:r>
+            <a:endParaRPr lang="fr-FR" sz="1100" b="1" i="1" dirty="0"/>
+          </a:p>
+        </p:txBody>
+      </p:sp>
+      <p:sp>
+        <p:nvSpPr>
+          <p:cNvPr id="6" name="ZoneTexte 5">
+            <a:extLst>
+              <a:ext uri="{FF2B5EF4-FFF2-40B4-BE49-F238E27FC236}">
+                <a16:creationId xmlns:a16="http://schemas.microsoft.com/office/drawing/2014/main" id="{B2FE09CD-C582-E190-90D9-2C79F0C8B316}"/>
+              </a:ext>
+            </a:extLst>
+          </p:cNvPr>
+          <p:cNvSpPr txBox="1"/>
+          <p:nvPr/>
+        </p:nvSpPr>
+        <p:spPr>
+          <a:xfrm>
+            <a:off x="2631879" y="837914"/>
+            <a:ext cx="2446235" cy="261610"/>
+          </a:xfrm>
+          <a:prstGeom prst="rect">
+            <a:avLst/>
+          </a:prstGeom>
+          <a:noFill/>
+        </p:spPr>
+        <p:txBody>
+          <a:bodyPr wrap="square" rtlCol="0">
+            <a:spAutoFit/>
+          </a:bodyPr>
+          <a:lstStyle/>
+          <a:p>
+            <a:r>
+              <a:rPr lang="fr-FR" sz="1100" b="1" i="1" dirty="0"/>
+              <a:t>Real-Time API</a:t>
+            </a:r>
+          </a:p>
+        </p:txBody>
+      </p:sp>
+      <p:sp>
+        <p:nvSpPr>
+          <p:cNvPr id="9" name="ZoneTexte 8">
+            <a:extLst>
+              <a:ext uri="{FF2B5EF4-FFF2-40B4-BE49-F238E27FC236}">
+                <a16:creationId xmlns:a16="http://schemas.microsoft.com/office/drawing/2014/main" id="{C83BBBA1-175A-C1C2-5136-6D2F80A94A3F}"/>
+              </a:ext>
+            </a:extLst>
+          </p:cNvPr>
+          <p:cNvSpPr txBox="1"/>
+          <p:nvPr/>
+        </p:nvSpPr>
+        <p:spPr>
+          <a:xfrm>
+            <a:off x="79769" y="231064"/>
+            <a:ext cx="2446235" cy="307777"/>
+          </a:xfrm>
+          <a:prstGeom prst="rect">
+            <a:avLst/>
+          </a:prstGeom>
+          <a:noFill/>
+        </p:spPr>
+        <p:txBody>
+          <a:bodyPr wrap="square" rtlCol="0">
+            <a:spAutoFit/>
+          </a:bodyPr>
+          <a:lstStyle/>
+          <a:p>
+            <a:r>
+              <a:rPr lang="fr-FR" sz="1400" b="1" u="sng" dirty="0">
+                <a:solidFill>
+                  <a:srgbClr val="FF0000"/>
+                </a:solidFill>
+              </a:rPr>
+              <a:t>Data Sources</a:t>
+            </a:r>
+          </a:p>
+        </p:txBody>
+      </p:sp>
+      <p:sp>
+        <p:nvSpPr>
+          <p:cNvPr id="11" name="ZoneTexte 10">
+            <a:extLst>
+              <a:ext uri="{FF2B5EF4-FFF2-40B4-BE49-F238E27FC236}">
+                <a16:creationId xmlns:a16="http://schemas.microsoft.com/office/drawing/2014/main" id="{0C23B9D5-3C57-2FCE-E322-E4963F6B7824}"/>
+              </a:ext>
+            </a:extLst>
+          </p:cNvPr>
+          <p:cNvSpPr txBox="1"/>
+          <p:nvPr/>
+        </p:nvSpPr>
+        <p:spPr>
+          <a:xfrm>
+            <a:off x="142759" y="6023261"/>
+            <a:ext cx="2446235" cy="307777"/>
+          </a:xfrm>
+          <a:prstGeom prst="rect">
+            <a:avLst/>
+          </a:prstGeom>
+          <a:noFill/>
+        </p:spPr>
+        <p:txBody>
+          <a:bodyPr wrap="square" rtlCol="0">
+            <a:spAutoFit/>
+          </a:bodyPr>
+          <a:lstStyle/>
+          <a:p>
+            <a:r>
+              <a:rPr lang="fr-FR" sz="1400" b="1" u="sng" dirty="0">
+                <a:solidFill>
+                  <a:srgbClr val="FF0000"/>
+                </a:solidFill>
+              </a:rPr>
+              <a:t>Machine Learning</a:t>
+            </a:r>
+          </a:p>
+        </p:txBody>
+      </p:sp>
+      <p:pic>
+        <p:nvPicPr>
+          <p:cNvPr id="1056" name="Picture 32" descr="Database Icons - Free SVG &amp; PNG Database Images - Noun Project">
+            <a:extLst>
+              <a:ext uri="{FF2B5EF4-FFF2-40B4-BE49-F238E27FC236}">
+                <a16:creationId xmlns:a16="http://schemas.microsoft.com/office/drawing/2014/main" id="{1047CF3E-64AA-B9F0-EF27-25DDCD54CFBA}"/>
+              </a:ext>
+            </a:extLst>
+          </p:cNvPr>
+          <p:cNvPicPr>
+            <a:picLocks noChangeAspect="1" noChangeArrowheads="1"/>
+          </p:cNvPicPr>
+          <p:nvPr/>
+        </p:nvPicPr>
+        <p:blipFill>
+          <a:blip r:embed="rId9">
+            <a:extLst>
+              <a:ext uri="{28A0092B-C50C-407E-A947-70E740481C1C}">
+                <a14:useLocalDpi xmlns:a14="http://schemas.microsoft.com/office/drawing/2010/main" val="0"/>
+              </a:ext>
+            </a:extLst>
+          </a:blip>
+          <a:srcRect/>
+          <a:stretch>
+            <a:fillRect/>
+          </a:stretch>
+        </p:blipFill>
+        <p:spPr bwMode="auto">
+          <a:xfrm>
+            <a:off x="423879" y="1771487"/>
+            <a:ext cx="986116" cy="986116"/>
+          </a:xfrm>
+          <a:prstGeom prst="rect">
+            <a:avLst/>
+          </a:prstGeom>
+          <a:noFill/>
+          <a:extLst>
+            <a:ext uri="{909E8E84-426E-40DD-AFC4-6F175D3DCCD1}">
+              <a14:hiddenFill xmlns:a14="http://schemas.microsoft.com/office/drawing/2010/main">
+                <a:solidFill>
+                  <a:srgbClr val="FFFFFF"/>
+                </a:solidFill>
+              </a14:hiddenFill>
+            </a:ext>
+          </a:extLst>
+        </p:spPr>
+      </p:pic>
+      <p:pic>
+        <p:nvPicPr>
+          <p:cNvPr id="1064" name="Picture 40" descr="Machine Learning Icon - Free Download Science &amp; Technology Icons | IconScout">
+            <a:extLst>
+              <a:ext uri="{FF2B5EF4-FFF2-40B4-BE49-F238E27FC236}">
+                <a16:creationId xmlns:a16="http://schemas.microsoft.com/office/drawing/2014/main" id="{C85F6B9E-E947-982A-3B3C-D874575A35C6}"/>
+              </a:ext>
+            </a:extLst>
+          </p:cNvPr>
+          <p:cNvPicPr>
+            <a:picLocks noChangeAspect="1" noChangeArrowheads="1"/>
+          </p:cNvPicPr>
+          <p:nvPr/>
+        </p:nvPicPr>
+        <p:blipFill>
+          <a:blip r:embed="rId10">
+            <a:extLst>
+              <a:ext uri="{28A0092B-C50C-407E-A947-70E740481C1C}">
+                <a14:useLocalDpi xmlns:a14="http://schemas.microsoft.com/office/drawing/2010/main" val="0"/>
+              </a:ext>
+            </a:extLst>
+          </a:blip>
+          <a:srcRect/>
+          <a:stretch>
+            <a:fillRect/>
+          </a:stretch>
+        </p:blipFill>
+        <p:spPr bwMode="auto">
+          <a:xfrm>
+            <a:off x="-5460947" y="4217717"/>
+            <a:ext cx="137352" cy="137352"/>
+          </a:xfrm>
+          <a:prstGeom prst="rect">
+            <a:avLst/>
+          </a:prstGeom>
+          <a:noFill/>
+          <a:extLst>
+            <a:ext uri="{909E8E84-426E-40DD-AFC4-6F175D3DCCD1}">
+              <a14:hiddenFill xmlns:a14="http://schemas.microsoft.com/office/drawing/2010/main">
+                <a:solidFill>
+                  <a:srgbClr val="FFFFFF"/>
+                </a:solidFill>
+              </a14:hiddenFill>
+            </a:ext>
+          </a:extLst>
+        </p:spPr>
+      </p:pic>
+      <p:pic>
+        <p:nvPicPr>
+          <p:cNvPr id="1068" name="Picture 44" descr="Python logo - Icônes Médias sociaux et logos">
+            <a:extLst>
+              <a:ext uri="{FF2B5EF4-FFF2-40B4-BE49-F238E27FC236}">
+                <a16:creationId xmlns:a16="http://schemas.microsoft.com/office/drawing/2014/main" id="{787C8B72-916D-2ABF-0357-C8B810077001}"/>
+              </a:ext>
+            </a:extLst>
+          </p:cNvPr>
+          <p:cNvPicPr>
+            <a:picLocks noChangeAspect="1" noChangeArrowheads="1"/>
+          </p:cNvPicPr>
+          <p:nvPr/>
+        </p:nvPicPr>
+        <p:blipFill>
+          <a:blip r:embed="rId11">
+            <a:extLst>
+              <a:ext uri="{28A0092B-C50C-407E-A947-70E740481C1C}">
+                <a14:useLocalDpi xmlns:a14="http://schemas.microsoft.com/office/drawing/2010/main" val="0"/>
+              </a:ext>
+            </a:extLst>
+          </a:blip>
+          <a:srcRect/>
+          <a:stretch>
+            <a:fillRect/>
+          </a:stretch>
+        </p:blipFill>
+        <p:spPr bwMode="auto">
+          <a:xfrm>
+            <a:off x="5835314" y="3948425"/>
+            <a:ext cx="463647" cy="463647"/>
+          </a:xfrm>
+          <a:prstGeom prst="rect">
+            <a:avLst/>
+          </a:prstGeom>
+          <a:noFill/>
+          <a:extLst>
+            <a:ext uri="{909E8E84-426E-40DD-AFC4-6F175D3DCCD1}">
+              <a14:hiddenFill xmlns:a14="http://schemas.microsoft.com/office/drawing/2010/main">
+                <a:solidFill>
+                  <a:srgbClr val="FFFFFF"/>
+                </a:solidFill>
+              </a14:hiddenFill>
+            </a:ext>
+          </a:extLst>
+        </p:spPr>
+      </p:pic>
+      <p:sp>
+        <p:nvSpPr>
+          <p:cNvPr id="21" name="ZoneTexte 20">
+            <a:extLst>
+              <a:ext uri="{FF2B5EF4-FFF2-40B4-BE49-F238E27FC236}">
+                <a16:creationId xmlns:a16="http://schemas.microsoft.com/office/drawing/2014/main" id="{55F13B9B-66FD-B63A-4CD1-8EC8538B7019}"/>
+              </a:ext>
+            </a:extLst>
+          </p:cNvPr>
+          <p:cNvSpPr txBox="1"/>
+          <p:nvPr/>
+        </p:nvSpPr>
+        <p:spPr>
+          <a:xfrm>
+            <a:off x="11559339" y="253684"/>
+            <a:ext cx="2446235" cy="307777"/>
+          </a:xfrm>
+          <a:prstGeom prst="rect">
+            <a:avLst/>
+          </a:prstGeom>
+          <a:noFill/>
+        </p:spPr>
+        <p:txBody>
+          <a:bodyPr wrap="square" rtlCol="0">
+            <a:spAutoFit/>
+          </a:bodyPr>
+          <a:lstStyle/>
+          <a:p>
+            <a:r>
+              <a:rPr lang="fr-FR" sz="1400" b="1" u="sng" dirty="0">
+                <a:solidFill>
+                  <a:srgbClr val="FF0000"/>
+                </a:solidFill>
+              </a:rPr>
+              <a:t>User</a:t>
+            </a:r>
+          </a:p>
+        </p:txBody>
+      </p:sp>
+      <p:sp>
+        <p:nvSpPr>
+          <p:cNvPr id="22" name="ZoneTexte 21">
+            <a:extLst>
+              <a:ext uri="{FF2B5EF4-FFF2-40B4-BE49-F238E27FC236}">
+                <a16:creationId xmlns:a16="http://schemas.microsoft.com/office/drawing/2014/main" id="{28EFA2C5-9436-42B5-E0FC-25289A01F5D7}"/>
+              </a:ext>
+            </a:extLst>
+          </p:cNvPr>
+          <p:cNvSpPr txBox="1"/>
+          <p:nvPr/>
+        </p:nvSpPr>
+        <p:spPr>
+          <a:xfrm>
+            <a:off x="11382774" y="6026722"/>
+            <a:ext cx="2446235" cy="307777"/>
+          </a:xfrm>
+          <a:prstGeom prst="rect">
+            <a:avLst/>
+          </a:prstGeom>
+          <a:noFill/>
+        </p:spPr>
+        <p:txBody>
+          <a:bodyPr wrap="square" rtlCol="0">
+            <a:spAutoFit/>
+          </a:bodyPr>
+          <a:lstStyle/>
+          <a:p>
+            <a:r>
+              <a:rPr lang="fr-FR" sz="1400" b="1" u="sng" dirty="0">
+                <a:solidFill>
+                  <a:srgbClr val="FF0000"/>
+                </a:solidFill>
+              </a:rPr>
+              <a:t>Storage</a:t>
+            </a:r>
+          </a:p>
+        </p:txBody>
+      </p:sp>
+      <p:sp>
+        <p:nvSpPr>
+          <p:cNvPr id="23" name="ZoneTexte 22">
+            <a:extLst>
+              <a:ext uri="{FF2B5EF4-FFF2-40B4-BE49-F238E27FC236}">
+                <a16:creationId xmlns:a16="http://schemas.microsoft.com/office/drawing/2014/main" id="{36BE535F-6CFD-DECB-C1A8-8C879F5C325E}"/>
+              </a:ext>
+            </a:extLst>
+          </p:cNvPr>
+          <p:cNvSpPr txBox="1"/>
+          <p:nvPr/>
+        </p:nvSpPr>
+        <p:spPr>
+          <a:xfrm>
+            <a:off x="5087501" y="2622203"/>
+            <a:ext cx="2446235" cy="307777"/>
+          </a:xfrm>
+          <a:prstGeom prst="rect">
+            <a:avLst/>
+          </a:prstGeom>
+          <a:noFill/>
+        </p:spPr>
+        <p:txBody>
+          <a:bodyPr wrap="square" rtlCol="0">
+            <a:spAutoFit/>
+          </a:bodyPr>
+          <a:lstStyle/>
+          <a:p>
+            <a:r>
+              <a:rPr lang="fr-FR" sz="1400" b="1" u="sng" dirty="0">
+                <a:solidFill>
+                  <a:srgbClr val="FF0000"/>
+                </a:solidFill>
+              </a:rPr>
+              <a:t>Workflow orchestration</a:t>
+            </a:r>
+          </a:p>
+        </p:txBody>
+      </p:sp>
+      <p:pic>
+        <p:nvPicPr>
+          <p:cNvPr id="1070" name="Picture 46" descr="Machine learning model&quot; Icon - Download for free – Iconduck">
+            <a:extLst>
+              <a:ext uri="{FF2B5EF4-FFF2-40B4-BE49-F238E27FC236}">
+                <a16:creationId xmlns:a16="http://schemas.microsoft.com/office/drawing/2014/main" id="{ADE9EFAB-9C79-0FE8-5A99-DADA44CC5F0D}"/>
+              </a:ext>
+            </a:extLst>
+          </p:cNvPr>
+          <p:cNvPicPr>
+            <a:picLocks noChangeAspect="1" noChangeArrowheads="1"/>
+          </p:cNvPicPr>
+          <p:nvPr/>
+        </p:nvPicPr>
+        <p:blipFill>
+          <a:blip r:embed="rId12">
+            <a:extLst>
+              <a:ext uri="{28A0092B-C50C-407E-A947-70E740481C1C}">
+                <a14:useLocalDpi xmlns:a14="http://schemas.microsoft.com/office/drawing/2010/main" val="0"/>
+              </a:ext>
+            </a:extLst>
+          </a:blip>
+          <a:srcRect/>
+          <a:stretch>
+            <a:fillRect/>
+          </a:stretch>
+        </p:blipFill>
+        <p:spPr bwMode="auto">
+          <a:xfrm>
+            <a:off x="436921" y="5088826"/>
+            <a:ext cx="921615" cy="921615"/>
+          </a:xfrm>
+          <a:prstGeom prst="rect">
+            <a:avLst/>
+          </a:prstGeom>
+          <a:noFill/>
+          <a:extLst>
+            <a:ext uri="{909E8E84-426E-40DD-AFC4-6F175D3DCCD1}">
+              <a14:hiddenFill xmlns:a14="http://schemas.microsoft.com/office/drawing/2010/main">
+                <a:solidFill>
+                  <a:srgbClr val="FFFFFF"/>
+                </a:solidFill>
+              </a14:hiddenFill>
+            </a:ext>
+          </a:extLst>
+        </p:spPr>
+      </p:pic>
+      <p:sp>
+        <p:nvSpPr>
+          <p:cNvPr id="35" name="ZoneTexte 34">
+            <a:extLst>
+              <a:ext uri="{FF2B5EF4-FFF2-40B4-BE49-F238E27FC236}">
+                <a16:creationId xmlns:a16="http://schemas.microsoft.com/office/drawing/2014/main" id="{DC7B7B57-F41A-F651-86C3-805798669547}"/>
+              </a:ext>
+            </a:extLst>
+          </p:cNvPr>
+          <p:cNvSpPr txBox="1"/>
+          <p:nvPr/>
+        </p:nvSpPr>
+        <p:spPr>
+          <a:xfrm>
+            <a:off x="2693904" y="5459512"/>
+            <a:ext cx="2446235" cy="430887"/>
+          </a:xfrm>
+          <a:prstGeom prst="rect">
+            <a:avLst/>
+          </a:prstGeom>
+          <a:noFill/>
+        </p:spPr>
+        <p:txBody>
+          <a:bodyPr wrap="square" rtlCol="0">
+            <a:spAutoFit/>
+          </a:bodyPr>
+          <a:lstStyle/>
+          <a:p>
+            <a:pPr algn="ctr"/>
+            <a:r>
+              <a:rPr lang="fr-FR" sz="1100" b="1" i="1" dirty="0" err="1"/>
+              <a:t>Performed</a:t>
+            </a:r>
+            <a:r>
+              <a:rPr lang="fr-FR" sz="1100" b="1" i="1" dirty="0"/>
+              <a:t> on </a:t>
+            </a:r>
+            <a:r>
+              <a:rPr lang="fr-FR" sz="1100" b="1" i="1" dirty="0" err="1"/>
+              <a:t>scikit-learn</a:t>
+            </a:r>
+            <a:br>
+              <a:rPr lang="fr-FR" sz="1100" b="1" i="1" dirty="0"/>
+            </a:br>
+            <a:r>
+              <a:rPr lang="fr-FR" sz="1100" b="1" i="1" dirty="0" err="1"/>
+              <a:t>Tracked</a:t>
+            </a:r>
+            <a:r>
+              <a:rPr lang="fr-FR" sz="1100" b="1" i="1" dirty="0"/>
+              <a:t> on </a:t>
+            </a:r>
+            <a:r>
+              <a:rPr lang="fr-FR" sz="1100" b="1" i="1" dirty="0" err="1"/>
+              <a:t>Mlflow</a:t>
+            </a:r>
+            <a:endParaRPr lang="fr-FR" sz="1100" b="1" i="1" dirty="0"/>
+          </a:p>
+        </p:txBody>
+      </p:sp>
+      <p:pic>
+        <p:nvPicPr>
+          <p:cNvPr id="1076" name="Picture 52">
+            <a:extLst>
+              <a:ext uri="{FF2B5EF4-FFF2-40B4-BE49-F238E27FC236}">
+                <a16:creationId xmlns:a16="http://schemas.microsoft.com/office/drawing/2014/main" id="{D3E5469D-F32C-8BE8-F13F-002C04768376}"/>
+              </a:ext>
+            </a:extLst>
+          </p:cNvPr>
+          <p:cNvPicPr>
+            <a:picLocks noChangeAspect="1" noChangeArrowheads="1"/>
+          </p:cNvPicPr>
+          <p:nvPr/>
+        </p:nvPicPr>
+        <p:blipFill>
+          <a:blip r:embed="rId13">
+            <a:extLst>
+              <a:ext uri="{28A0092B-C50C-407E-A947-70E740481C1C}">
+                <a14:useLocalDpi xmlns:a14="http://schemas.microsoft.com/office/drawing/2010/main" val="0"/>
+              </a:ext>
+            </a:extLst>
+          </a:blip>
+          <a:srcRect/>
+          <a:stretch>
+            <a:fillRect/>
+          </a:stretch>
+        </p:blipFill>
+        <p:spPr bwMode="auto">
+          <a:xfrm>
+            <a:off x="7044865" y="5015244"/>
+            <a:ext cx="817841" cy="978352"/>
+          </a:xfrm>
+          <a:prstGeom prst="rect">
+            <a:avLst/>
+          </a:prstGeom>
+          <a:noFill/>
+          <a:extLst>
+            <a:ext uri="{909E8E84-426E-40DD-AFC4-6F175D3DCCD1}">
+              <a14:hiddenFill xmlns:a14="http://schemas.microsoft.com/office/drawing/2010/main">
+                <a:solidFill>
+                  <a:srgbClr val="FFFFFF"/>
+                </a:solidFill>
+              </a14:hiddenFill>
+            </a:ext>
+          </a:extLst>
+        </p:spPr>
+      </p:pic>
+      <p:pic>
+        <p:nvPicPr>
+          <p:cNvPr id="1080" name="Picture 56">
+            <a:extLst>
+              <a:ext uri="{FF2B5EF4-FFF2-40B4-BE49-F238E27FC236}">
+                <a16:creationId xmlns:a16="http://schemas.microsoft.com/office/drawing/2014/main" id="{22E30CB2-448C-FAB5-7FF3-57F2F9C67758}"/>
+              </a:ext>
+            </a:extLst>
+          </p:cNvPr>
+          <p:cNvPicPr>
+            <a:picLocks noChangeAspect="1" noChangeArrowheads="1"/>
+          </p:cNvPicPr>
+          <p:nvPr/>
+        </p:nvPicPr>
+        <p:blipFill>
+          <a:blip r:embed="rId14">
+            <a:extLst>
+              <a:ext uri="{28A0092B-C50C-407E-A947-70E740481C1C}">
+                <a14:useLocalDpi xmlns:a14="http://schemas.microsoft.com/office/drawing/2010/main" val="0"/>
+              </a:ext>
+            </a:extLst>
+          </a:blip>
+          <a:srcRect/>
+          <a:stretch>
+            <a:fillRect/>
+          </a:stretch>
+        </p:blipFill>
+        <p:spPr bwMode="auto">
+          <a:xfrm>
+            <a:off x="10181631" y="4275132"/>
+            <a:ext cx="2052184" cy="547249"/>
+          </a:xfrm>
+          <a:prstGeom prst="rect">
+            <a:avLst/>
+          </a:prstGeom>
+          <a:noFill/>
+          <a:extLst>
+            <a:ext uri="{909E8E84-426E-40DD-AFC4-6F175D3DCCD1}">
+              <a14:hiddenFill xmlns:a14="http://schemas.microsoft.com/office/drawing/2010/main">
+                <a:solidFill>
+                  <a:srgbClr val="FFFFFF"/>
+                </a:solidFill>
+              </a14:hiddenFill>
+            </a:ext>
+          </a:extLst>
+        </p:spPr>
+      </p:pic>
+      <p:pic>
+        <p:nvPicPr>
+          <p:cNvPr id="1082" name="Picture 58" descr="Fraud detection - Free business and finance icons">
+            <a:extLst>
+              <a:ext uri="{FF2B5EF4-FFF2-40B4-BE49-F238E27FC236}">
+                <a16:creationId xmlns:a16="http://schemas.microsoft.com/office/drawing/2014/main" id="{0679B57B-6262-9482-DA1C-57242BC067C0}"/>
+              </a:ext>
+            </a:extLst>
+          </p:cNvPr>
+          <p:cNvPicPr>
+            <a:picLocks noChangeAspect="1" noChangeArrowheads="1"/>
+          </p:cNvPicPr>
+          <p:nvPr/>
+        </p:nvPicPr>
+        <p:blipFill>
+          <a:blip r:embed="rId15">
+            <a:extLst>
+              <a:ext uri="{28A0092B-C50C-407E-A947-70E740481C1C}">
+                <a14:useLocalDpi xmlns:a14="http://schemas.microsoft.com/office/drawing/2010/main" val="0"/>
+              </a:ext>
+            </a:extLst>
+          </a:blip>
+          <a:srcRect/>
+          <a:stretch>
+            <a:fillRect/>
+          </a:stretch>
+        </p:blipFill>
+        <p:spPr bwMode="auto">
+          <a:xfrm>
+            <a:off x="8412394" y="1391127"/>
+            <a:ext cx="914586" cy="914586"/>
+          </a:xfrm>
+          <a:prstGeom prst="rect">
+            <a:avLst/>
+          </a:prstGeom>
+          <a:noFill/>
+          <a:extLst>
+            <a:ext uri="{909E8E84-426E-40DD-AFC4-6F175D3DCCD1}">
+              <a14:hiddenFill xmlns:a14="http://schemas.microsoft.com/office/drawing/2010/main">
+                <a:solidFill>
+                  <a:srgbClr val="FFFFFF"/>
+                </a:solidFill>
+              </a14:hiddenFill>
+            </a:ext>
+          </a:extLst>
+        </p:spPr>
+      </p:pic>
+      <p:cxnSp>
+        <p:nvCxnSpPr>
+          <p:cNvPr id="40" name="Connecteur droit avec flèche 39">
+            <a:extLst>
+              <a:ext uri="{FF2B5EF4-FFF2-40B4-BE49-F238E27FC236}">
+                <a16:creationId xmlns:a16="http://schemas.microsoft.com/office/drawing/2014/main" id="{04F2E30A-197C-C8FF-1779-FF4BFA75C4F5}"/>
+              </a:ext>
+            </a:extLst>
+          </p:cNvPr>
+          <p:cNvCxnSpPr>
+            <a:cxnSpLocks/>
+          </p:cNvCxnSpPr>
+          <p:nvPr/>
+        </p:nvCxnSpPr>
+        <p:spPr>
+          <a:xfrm>
+            <a:off x="3936745" y="1881438"/>
+            <a:ext cx="948717" cy="817011"/>
+          </a:xfrm>
+          <a:prstGeom prst="straightConnector1">
+            <a:avLst/>
+          </a:prstGeom>
+          <a:ln>
+            <a:tailEnd type="triangle"/>
+          </a:ln>
+        </p:spPr>
+        <p:style>
+          <a:lnRef idx="2">
+            <a:schemeClr val="accent1"/>
+          </a:lnRef>
+          <a:fillRef idx="0">
+            <a:schemeClr val="accent1"/>
+          </a:fillRef>
+          <a:effectRef idx="1">
+            <a:schemeClr val="accent1"/>
+          </a:effectRef>
+          <a:fontRef idx="minor">
+            <a:schemeClr val="tx1"/>
+          </a:fontRef>
+        </p:style>
+      </p:cxnSp>
+      <p:cxnSp>
+        <p:nvCxnSpPr>
+          <p:cNvPr id="41" name="Connecteur droit avec flèche 40">
+            <a:extLst>
+              <a:ext uri="{FF2B5EF4-FFF2-40B4-BE49-F238E27FC236}">
+                <a16:creationId xmlns:a16="http://schemas.microsoft.com/office/drawing/2014/main" id="{9FD35E68-3A49-6DEB-A70D-3AC4DBD1C5F9}"/>
+              </a:ext>
+            </a:extLst>
+          </p:cNvPr>
+          <p:cNvCxnSpPr>
+            <a:cxnSpLocks/>
+          </p:cNvCxnSpPr>
+          <p:nvPr/>
+        </p:nvCxnSpPr>
+        <p:spPr>
+          <a:xfrm>
+            <a:off x="1245140" y="2698449"/>
+            <a:ext cx="1516204" cy="1422531"/>
+          </a:xfrm>
+          <a:prstGeom prst="straightConnector1">
+            <a:avLst/>
+          </a:prstGeom>
+          <a:ln>
+            <a:tailEnd type="triangle"/>
+          </a:ln>
+        </p:spPr>
+        <p:style>
+          <a:lnRef idx="2">
+            <a:schemeClr val="accent1"/>
+          </a:lnRef>
+          <a:fillRef idx="0">
+            <a:schemeClr val="accent1"/>
+          </a:fillRef>
+          <a:effectRef idx="1">
+            <a:schemeClr val="accent1"/>
+          </a:effectRef>
+          <a:fontRef idx="minor">
+            <a:schemeClr val="tx1"/>
+          </a:fontRef>
+        </p:style>
+      </p:cxnSp>
+      <p:cxnSp>
+        <p:nvCxnSpPr>
+          <p:cNvPr id="43" name="Connecteur droit avec flèche 42">
+            <a:extLst>
+              <a:ext uri="{FF2B5EF4-FFF2-40B4-BE49-F238E27FC236}">
+                <a16:creationId xmlns:a16="http://schemas.microsoft.com/office/drawing/2014/main" id="{38B47C95-B0C3-22A2-F990-10176E5ABF06}"/>
+              </a:ext>
+            </a:extLst>
+          </p:cNvPr>
+          <p:cNvCxnSpPr>
+            <a:cxnSpLocks/>
+          </p:cNvCxnSpPr>
+          <p:nvPr/>
+        </p:nvCxnSpPr>
+        <p:spPr>
+          <a:xfrm>
+            <a:off x="5012535" y="5146207"/>
+            <a:ext cx="1931412" cy="311238"/>
+          </a:xfrm>
+          <a:prstGeom prst="straightConnector1">
+            <a:avLst/>
+          </a:prstGeom>
+          <a:ln>
+            <a:tailEnd type="triangle"/>
+          </a:ln>
+        </p:spPr>
+        <p:style>
+          <a:lnRef idx="2">
+            <a:schemeClr val="accent1"/>
+          </a:lnRef>
+          <a:fillRef idx="0">
+            <a:schemeClr val="accent1"/>
+          </a:fillRef>
+          <a:effectRef idx="1">
+            <a:schemeClr val="accent1"/>
+          </a:effectRef>
+          <a:fontRef idx="minor">
+            <a:schemeClr val="tx1"/>
+          </a:fontRef>
+        </p:style>
+      </p:cxnSp>
+      <p:cxnSp>
+        <p:nvCxnSpPr>
+          <p:cNvPr id="45" name="Connecteur droit avec flèche 44">
+            <a:extLst>
+              <a:ext uri="{FF2B5EF4-FFF2-40B4-BE49-F238E27FC236}">
+                <a16:creationId xmlns:a16="http://schemas.microsoft.com/office/drawing/2014/main" id="{25E08704-2F4C-EA8A-CCCD-C82911362BFD}"/>
+              </a:ext>
+            </a:extLst>
+          </p:cNvPr>
+          <p:cNvCxnSpPr>
+            <a:cxnSpLocks/>
+          </p:cNvCxnSpPr>
+          <p:nvPr/>
+        </p:nvCxnSpPr>
+        <p:spPr>
+          <a:xfrm>
+            <a:off x="6923371" y="4681221"/>
+            <a:ext cx="229538" cy="310345"/>
+          </a:xfrm>
+          <a:prstGeom prst="straightConnector1">
+            <a:avLst/>
+          </a:prstGeom>
+          <a:ln>
+            <a:tailEnd type="triangle"/>
+          </a:ln>
+        </p:spPr>
+        <p:style>
+          <a:lnRef idx="2">
+            <a:schemeClr val="accent1"/>
+          </a:lnRef>
+          <a:fillRef idx="0">
+            <a:schemeClr val="accent1"/>
+          </a:fillRef>
+          <a:effectRef idx="1">
+            <a:schemeClr val="accent1"/>
+          </a:effectRef>
+          <a:fontRef idx="minor">
+            <a:schemeClr val="tx1"/>
+          </a:fontRef>
+        </p:style>
+      </p:cxnSp>
+      <p:cxnSp>
+        <p:nvCxnSpPr>
+          <p:cNvPr id="49" name="Connecteur droit avec flèche 48">
+            <a:extLst>
+              <a:ext uri="{FF2B5EF4-FFF2-40B4-BE49-F238E27FC236}">
+                <a16:creationId xmlns:a16="http://schemas.microsoft.com/office/drawing/2014/main" id="{808740E2-D960-5D5E-DCFB-792FD4E0D93D}"/>
+              </a:ext>
+            </a:extLst>
+          </p:cNvPr>
+          <p:cNvCxnSpPr>
+            <a:cxnSpLocks/>
+          </p:cNvCxnSpPr>
+          <p:nvPr/>
+        </p:nvCxnSpPr>
+        <p:spPr>
+          <a:xfrm>
+            <a:off x="7692652" y="4093802"/>
+            <a:ext cx="881670" cy="927882"/>
+          </a:xfrm>
+          <a:prstGeom prst="straightConnector1">
+            <a:avLst/>
+          </a:prstGeom>
+          <a:ln>
+            <a:tailEnd type="triangle"/>
+          </a:ln>
+        </p:spPr>
+        <p:style>
+          <a:lnRef idx="2">
+            <a:schemeClr val="accent1"/>
+          </a:lnRef>
+          <a:fillRef idx="0">
+            <a:schemeClr val="accent1"/>
+          </a:fillRef>
+          <a:effectRef idx="1">
+            <a:schemeClr val="accent1"/>
+          </a:effectRef>
+          <a:fontRef idx="minor">
+            <a:schemeClr val="tx1"/>
+          </a:fontRef>
+        </p:style>
+      </p:cxnSp>
+      <p:cxnSp>
+        <p:nvCxnSpPr>
+          <p:cNvPr id="51" name="Connecteur droit avec flèche 50">
+            <a:extLst>
+              <a:ext uri="{FF2B5EF4-FFF2-40B4-BE49-F238E27FC236}">
+                <a16:creationId xmlns:a16="http://schemas.microsoft.com/office/drawing/2014/main" id="{4347B41C-D9B5-8592-957D-643A87D93228}"/>
+              </a:ext>
+            </a:extLst>
+          </p:cNvPr>
+          <p:cNvCxnSpPr>
+            <a:cxnSpLocks/>
+          </p:cNvCxnSpPr>
+          <p:nvPr/>
+        </p:nvCxnSpPr>
+        <p:spPr>
+          <a:xfrm flipV="1">
+            <a:off x="7529232" y="2004753"/>
+            <a:ext cx="805500" cy="617450"/>
+          </a:xfrm>
+          <a:prstGeom prst="straightConnector1">
+            <a:avLst/>
+          </a:prstGeom>
+          <a:ln>
+            <a:tailEnd type="triangle"/>
+          </a:ln>
+        </p:spPr>
+        <p:style>
+          <a:lnRef idx="2">
+            <a:schemeClr val="accent1"/>
+          </a:lnRef>
+          <a:fillRef idx="0">
+            <a:schemeClr val="accent1"/>
+          </a:fillRef>
+          <a:effectRef idx="1">
+            <a:schemeClr val="accent1"/>
+          </a:effectRef>
+          <a:fontRef idx="minor">
+            <a:schemeClr val="tx1"/>
+          </a:fontRef>
+        </p:style>
+      </p:cxnSp>
+      <p:sp>
+        <p:nvSpPr>
+          <p:cNvPr id="54" name="ZoneTexte 53">
+            <a:extLst>
+              <a:ext uri="{FF2B5EF4-FFF2-40B4-BE49-F238E27FC236}">
+                <a16:creationId xmlns:a16="http://schemas.microsoft.com/office/drawing/2014/main" id="{0A6CA2BD-D2AC-D0E8-B396-ED646079321C}"/>
+              </a:ext>
+            </a:extLst>
+          </p:cNvPr>
+          <p:cNvSpPr txBox="1"/>
+          <p:nvPr/>
+        </p:nvSpPr>
+        <p:spPr>
+          <a:xfrm>
+            <a:off x="8233033" y="1021470"/>
+            <a:ext cx="2446235" cy="261610"/>
+          </a:xfrm>
+          <a:prstGeom prst="rect">
+            <a:avLst/>
+          </a:prstGeom>
+          <a:noFill/>
+        </p:spPr>
+        <p:txBody>
+          <a:bodyPr wrap="square" rtlCol="0">
+            <a:spAutoFit/>
+          </a:bodyPr>
+          <a:lstStyle/>
+          <a:p>
+            <a:r>
+              <a:rPr lang="fr-FR" sz="1100" b="1" i="1" dirty="0" err="1"/>
+              <a:t>Fraud</a:t>
+            </a:r>
+            <a:r>
+              <a:rPr lang="fr-FR" sz="1100" b="1" i="1" dirty="0"/>
+              <a:t> </a:t>
+            </a:r>
+            <a:r>
+              <a:rPr lang="fr-FR" sz="1100" b="1" i="1" dirty="0" err="1"/>
+              <a:t>Detection</a:t>
+            </a:r>
+            <a:endParaRPr lang="fr-FR" sz="1100" b="1" i="1" dirty="0"/>
+          </a:p>
+        </p:txBody>
+      </p:sp>
+      <p:cxnSp>
+        <p:nvCxnSpPr>
+          <p:cNvPr id="56" name="Connecteur droit avec flèche 55">
+            <a:extLst>
+              <a:ext uri="{FF2B5EF4-FFF2-40B4-BE49-F238E27FC236}">
+                <a16:creationId xmlns:a16="http://schemas.microsoft.com/office/drawing/2014/main" id="{EBE70E25-0E2B-9BF8-C077-AB5FE7441AF2}"/>
+              </a:ext>
+            </a:extLst>
+          </p:cNvPr>
+          <p:cNvCxnSpPr>
+            <a:cxnSpLocks/>
+            <a:stCxn id="1082" idx="2"/>
+          </p:cNvCxnSpPr>
+          <p:nvPr/>
+        </p:nvCxnSpPr>
+        <p:spPr>
+          <a:xfrm>
+            <a:off x="8869687" y="2305713"/>
+            <a:ext cx="277280" cy="2693620"/>
+          </a:xfrm>
+          <a:prstGeom prst="straightConnector1">
+            <a:avLst/>
+          </a:prstGeom>
+          <a:ln>
+            <a:tailEnd type="triangle"/>
+          </a:ln>
+        </p:spPr>
+        <p:style>
+          <a:lnRef idx="2">
+            <a:schemeClr val="accent1"/>
+          </a:lnRef>
+          <a:fillRef idx="0">
+            <a:schemeClr val="accent1"/>
+          </a:fillRef>
+          <a:effectRef idx="1">
+            <a:schemeClr val="accent1"/>
+          </a:effectRef>
+          <a:fontRef idx="minor">
+            <a:schemeClr val="tx1"/>
+          </a:fontRef>
+        </p:style>
+      </p:cxnSp>
+      <p:cxnSp>
+        <p:nvCxnSpPr>
+          <p:cNvPr id="59" name="Connecteur droit avec flèche 58">
+            <a:extLst>
+              <a:ext uri="{FF2B5EF4-FFF2-40B4-BE49-F238E27FC236}">
+                <a16:creationId xmlns:a16="http://schemas.microsoft.com/office/drawing/2014/main" id="{AF0CE495-ECC0-2EE0-12F5-5AEA131442ED}"/>
+              </a:ext>
+            </a:extLst>
+          </p:cNvPr>
+          <p:cNvCxnSpPr>
+            <a:cxnSpLocks/>
+          </p:cNvCxnSpPr>
+          <p:nvPr/>
+        </p:nvCxnSpPr>
+        <p:spPr>
+          <a:xfrm flipV="1">
+            <a:off x="9404101" y="1152275"/>
+            <a:ext cx="983326" cy="453090"/>
+          </a:xfrm>
+          <a:prstGeom prst="straightConnector1">
+            <a:avLst/>
+          </a:prstGeom>
+          <a:ln>
+            <a:tailEnd type="triangle"/>
+          </a:ln>
+        </p:spPr>
+        <p:style>
+          <a:lnRef idx="2">
+            <a:schemeClr val="accent1"/>
+          </a:lnRef>
+          <a:fillRef idx="0">
+            <a:schemeClr val="accent1"/>
+          </a:fillRef>
+          <a:effectRef idx="1">
+            <a:schemeClr val="accent1"/>
+          </a:effectRef>
+          <a:fontRef idx="minor">
+            <a:schemeClr val="tx1"/>
+          </a:fontRef>
+        </p:style>
+      </p:cxnSp>
+      <p:sp>
+        <p:nvSpPr>
+          <p:cNvPr id="61" name="ZoneTexte 60">
+            <a:extLst>
+              <a:ext uri="{FF2B5EF4-FFF2-40B4-BE49-F238E27FC236}">
+                <a16:creationId xmlns:a16="http://schemas.microsoft.com/office/drawing/2014/main" id="{78D19A6A-F75C-7222-DE88-1129423D2618}"/>
+              </a:ext>
+            </a:extLst>
+          </p:cNvPr>
+          <p:cNvSpPr txBox="1"/>
+          <p:nvPr/>
+        </p:nvSpPr>
+        <p:spPr>
+          <a:xfrm>
+            <a:off x="10622245" y="450557"/>
+            <a:ext cx="2446235" cy="261610"/>
+          </a:xfrm>
+          <a:prstGeom prst="rect">
+            <a:avLst/>
+          </a:prstGeom>
+          <a:noFill/>
+        </p:spPr>
+        <p:txBody>
+          <a:bodyPr wrap="square" rtlCol="0">
+            <a:spAutoFit/>
+          </a:bodyPr>
+          <a:lstStyle/>
+          <a:p>
+            <a:r>
+              <a:rPr lang="fr-FR" sz="1100" b="1" i="1" dirty="0"/>
+              <a:t>Email</a:t>
+            </a:r>
+          </a:p>
+        </p:txBody>
+      </p:sp>
+      <p:sp>
+        <p:nvSpPr>
+          <p:cNvPr id="62" name="ZoneTexte 61">
+            <a:extLst>
+              <a:ext uri="{FF2B5EF4-FFF2-40B4-BE49-F238E27FC236}">
+                <a16:creationId xmlns:a16="http://schemas.microsoft.com/office/drawing/2014/main" id="{B4A9F40D-20FB-6925-5AED-006033B9120C}"/>
+              </a:ext>
+            </a:extLst>
+          </p:cNvPr>
+          <p:cNvSpPr txBox="1"/>
+          <p:nvPr/>
+        </p:nvSpPr>
+        <p:spPr>
+          <a:xfrm>
+            <a:off x="10535554" y="1925242"/>
+            <a:ext cx="2446235" cy="261610"/>
+          </a:xfrm>
+          <a:prstGeom prst="rect">
+            <a:avLst/>
+          </a:prstGeom>
+          <a:noFill/>
+        </p:spPr>
+        <p:txBody>
+          <a:bodyPr wrap="square" rtlCol="0">
+            <a:spAutoFit/>
+          </a:bodyPr>
+          <a:lstStyle/>
+          <a:p>
+            <a:r>
+              <a:rPr lang="fr-FR" sz="1100" b="1" i="1" dirty="0"/>
+              <a:t>Dashboard</a:t>
+            </a:r>
+          </a:p>
+        </p:txBody>
+      </p:sp>
+      <p:cxnSp>
+        <p:nvCxnSpPr>
+          <p:cNvPr id="63" name="Connecteur droit avec flèche 62">
+            <a:extLst>
+              <a:ext uri="{FF2B5EF4-FFF2-40B4-BE49-F238E27FC236}">
+                <a16:creationId xmlns:a16="http://schemas.microsoft.com/office/drawing/2014/main" id="{51FB5D6A-6CB7-1E32-3A08-20238CC61290}"/>
+              </a:ext>
+            </a:extLst>
+          </p:cNvPr>
+          <p:cNvCxnSpPr>
+            <a:cxnSpLocks/>
+          </p:cNvCxnSpPr>
+          <p:nvPr/>
+        </p:nvCxnSpPr>
+        <p:spPr>
+          <a:xfrm flipV="1">
+            <a:off x="9950423" y="4871513"/>
+            <a:ext cx="371319" cy="304870"/>
+          </a:xfrm>
+          <a:prstGeom prst="straightConnector1">
+            <a:avLst/>
+          </a:prstGeom>
+          <a:ln>
+            <a:tailEnd type="triangle"/>
+          </a:ln>
+        </p:spPr>
+        <p:style>
+          <a:lnRef idx="2">
+            <a:schemeClr val="accent1"/>
+          </a:lnRef>
+          <a:fillRef idx="0">
+            <a:schemeClr val="accent1"/>
+          </a:fillRef>
+          <a:effectRef idx="1">
+            <a:schemeClr val="accent1"/>
+          </a:effectRef>
+          <a:fontRef idx="minor">
+            <a:schemeClr val="tx1"/>
+          </a:fontRef>
+        </p:style>
+      </p:cxnSp>
+      <p:cxnSp>
+        <p:nvCxnSpPr>
+          <p:cNvPr id="4" name="Connecteur droit avec flèche 3">
+            <a:extLst>
+              <a:ext uri="{FF2B5EF4-FFF2-40B4-BE49-F238E27FC236}">
+                <a16:creationId xmlns:a16="http://schemas.microsoft.com/office/drawing/2014/main" id="{C57A61C7-A76E-9E23-F9CA-2C6CEEE7F09F}"/>
+              </a:ext>
+            </a:extLst>
+          </p:cNvPr>
+          <p:cNvCxnSpPr>
+            <a:cxnSpLocks/>
+          </p:cNvCxnSpPr>
+          <p:nvPr/>
+        </p:nvCxnSpPr>
+        <p:spPr>
+          <a:xfrm flipH="1" flipV="1">
+            <a:off x="6917521" y="920060"/>
+            <a:ext cx="429724" cy="2647903"/>
+          </a:xfrm>
+          <a:prstGeom prst="straightConnector1">
+            <a:avLst/>
+          </a:prstGeom>
+          <a:ln>
+            <a:prstDash val="sysDot"/>
+            <a:tailEnd type="triangle"/>
+          </a:ln>
+        </p:spPr>
+        <p:style>
+          <a:lnRef idx="2">
+            <a:schemeClr val="accent1"/>
+          </a:lnRef>
+          <a:fillRef idx="0">
+            <a:schemeClr val="accent1"/>
+          </a:fillRef>
+          <a:effectRef idx="1">
+            <a:schemeClr val="accent1"/>
+          </a:effectRef>
+          <a:fontRef idx="minor">
+            <a:schemeClr val="tx1"/>
+          </a:fontRef>
+        </p:style>
+      </p:cxnSp>
+      <p:cxnSp>
+        <p:nvCxnSpPr>
+          <p:cNvPr id="1035" name="Connecteur droit avec flèche 1034">
+            <a:extLst>
+              <a:ext uri="{FF2B5EF4-FFF2-40B4-BE49-F238E27FC236}">
+                <a16:creationId xmlns:a16="http://schemas.microsoft.com/office/drawing/2014/main" id="{4BD791E0-0573-1889-A90B-FD2AA2FA7074}"/>
+              </a:ext>
+            </a:extLst>
+          </p:cNvPr>
+          <p:cNvCxnSpPr>
+            <a:cxnSpLocks/>
+          </p:cNvCxnSpPr>
+          <p:nvPr/>
+        </p:nvCxnSpPr>
+        <p:spPr>
+          <a:xfrm flipH="1" flipV="1">
+            <a:off x="10975708" y="2929604"/>
+            <a:ext cx="46331" cy="1246128"/>
+          </a:xfrm>
+          <a:prstGeom prst="straightConnector1">
+            <a:avLst/>
+          </a:prstGeom>
+          <a:ln>
+            <a:tailEnd type="triangle"/>
+          </a:ln>
+        </p:spPr>
+        <p:style>
+          <a:lnRef idx="2">
+            <a:schemeClr val="accent1"/>
+          </a:lnRef>
+          <a:fillRef idx="0">
+            <a:schemeClr val="accent1"/>
+          </a:fillRef>
+          <a:effectRef idx="1">
+            <a:schemeClr val="accent1"/>
+          </a:effectRef>
+          <a:fontRef idx="minor">
+            <a:schemeClr val="tx1"/>
+          </a:fontRef>
+        </p:style>
+      </p:cxnSp>
+      <p:sp>
+        <p:nvSpPr>
+          <p:cNvPr id="1047" name="ZoneTexte 1046">
+            <a:extLst>
+              <a:ext uri="{FF2B5EF4-FFF2-40B4-BE49-F238E27FC236}">
+                <a16:creationId xmlns:a16="http://schemas.microsoft.com/office/drawing/2014/main" id="{9106F8B7-365C-031E-CC4D-4EF5BA9A70F8}"/>
+              </a:ext>
+            </a:extLst>
+          </p:cNvPr>
+          <p:cNvSpPr txBox="1"/>
+          <p:nvPr/>
+        </p:nvSpPr>
+        <p:spPr>
+          <a:xfrm>
+            <a:off x="8242380" y="5807279"/>
+            <a:ext cx="3029866" cy="600164"/>
+          </a:xfrm>
+          <a:prstGeom prst="rect">
+            <a:avLst/>
+          </a:prstGeom>
+          <a:noFill/>
+        </p:spPr>
+        <p:txBody>
+          <a:bodyPr wrap="square" rtlCol="0">
+            <a:spAutoFit/>
+          </a:bodyPr>
+          <a:lstStyle/>
+          <a:p>
+            <a:pPr algn="ctr"/>
+            <a:r>
+              <a:rPr lang="fr-FR" sz="1100" b="1" i="1" dirty="0"/>
+              <a:t>Amazon S3 : Model and </a:t>
+            </a:r>
+            <a:r>
+              <a:rPr lang="fr-FR" sz="1100" b="1" i="1" dirty="0" err="1"/>
+              <a:t>Tracking</a:t>
+            </a:r>
+            <a:endParaRPr lang="fr-FR" sz="1100" b="1" i="1" dirty="0"/>
+          </a:p>
+          <a:p>
+            <a:pPr algn="ctr"/>
+            <a:r>
+              <a:rPr lang="fr-FR" sz="1100" b="1" i="1" dirty="0" err="1"/>
+              <a:t>NeonDB</a:t>
+            </a:r>
+            <a:r>
+              <a:rPr lang="fr-FR" sz="1100" b="1" i="1" dirty="0"/>
+              <a:t> : </a:t>
+            </a:r>
+            <a:r>
+              <a:rPr lang="fr-FR" sz="1100" b="1" i="1" dirty="0" err="1"/>
+              <a:t>Databases</a:t>
+            </a:r>
+            <a:endParaRPr lang="fr-FR" sz="1100" b="1" i="1" dirty="0"/>
+          </a:p>
+          <a:p>
+            <a:pPr algn="ctr"/>
+            <a:r>
+              <a:rPr lang="fr-FR" sz="1100" b="1" i="1" dirty="0" err="1"/>
+              <a:t>HuggingFace</a:t>
+            </a:r>
+            <a:r>
+              <a:rPr lang="fr-FR" sz="1100" b="1" i="1" dirty="0"/>
+              <a:t> : Dashboard </a:t>
+            </a:r>
+            <a:r>
+              <a:rPr lang="fr-FR" sz="1100" b="1" i="1" dirty="0" err="1"/>
+              <a:t>deployment</a:t>
+            </a:r>
+            <a:endParaRPr lang="fr-FR" sz="1100" b="1" i="1" dirty="0"/>
+          </a:p>
+        </p:txBody>
+      </p:sp>
+      <p:sp>
+        <p:nvSpPr>
+          <p:cNvPr id="2" name="ZoneTexte 1">
+            <a:extLst>
+              <a:ext uri="{FF2B5EF4-FFF2-40B4-BE49-F238E27FC236}">
+                <a16:creationId xmlns:a16="http://schemas.microsoft.com/office/drawing/2014/main" id="{FD047879-94FA-D467-F6E0-0CCBB616CAFA}"/>
+              </a:ext>
+            </a:extLst>
+          </p:cNvPr>
+          <p:cNvSpPr txBox="1"/>
+          <p:nvPr/>
+        </p:nvSpPr>
+        <p:spPr>
+          <a:xfrm>
+            <a:off x="1409995" y="3483802"/>
+            <a:ext cx="921615" cy="276999"/>
+          </a:xfrm>
+          <a:prstGeom prst="rect">
+            <a:avLst/>
+          </a:prstGeom>
+          <a:noFill/>
+        </p:spPr>
+        <p:txBody>
+          <a:bodyPr wrap="square" rtlCol="0">
+            <a:spAutoFit/>
+          </a:bodyPr>
+          <a:lstStyle/>
+          <a:p>
+            <a:r>
+              <a:rPr lang="fr-FR" sz="1200" b="1" dirty="0" err="1">
+                <a:solidFill>
+                  <a:schemeClr val="accent1"/>
+                </a:solidFill>
+                <a:latin typeface="Aptos" panose="020B0004020202020204" pitchFamily="34" charset="0"/>
+              </a:rPr>
+              <a:t>Step</a:t>
+            </a:r>
+            <a:r>
+              <a:rPr lang="fr-FR" sz="1200" b="1" dirty="0">
+                <a:solidFill>
+                  <a:schemeClr val="accent1"/>
+                </a:solidFill>
+                <a:latin typeface="Aptos" panose="020B0004020202020204" pitchFamily="34" charset="0"/>
+              </a:rPr>
+              <a:t> 1</a:t>
+            </a:r>
+          </a:p>
+        </p:txBody>
+      </p:sp>
+      <p:sp>
+        <p:nvSpPr>
+          <p:cNvPr id="3" name="ZoneTexte 2">
+            <a:extLst>
+              <a:ext uri="{FF2B5EF4-FFF2-40B4-BE49-F238E27FC236}">
+                <a16:creationId xmlns:a16="http://schemas.microsoft.com/office/drawing/2014/main" id="{00E93CF8-3A91-594F-0E61-B555DE08093F}"/>
+              </a:ext>
+            </a:extLst>
+          </p:cNvPr>
+          <p:cNvSpPr txBox="1"/>
+          <p:nvPr/>
+        </p:nvSpPr>
+        <p:spPr>
+          <a:xfrm>
+            <a:off x="5464141" y="5321012"/>
+            <a:ext cx="921615" cy="276999"/>
+          </a:xfrm>
+          <a:prstGeom prst="rect">
+            <a:avLst/>
+          </a:prstGeom>
+          <a:noFill/>
+        </p:spPr>
+        <p:txBody>
+          <a:bodyPr wrap="square" rtlCol="0">
+            <a:spAutoFit/>
+          </a:bodyPr>
+          <a:lstStyle/>
+          <a:p>
+            <a:r>
+              <a:rPr lang="fr-FR" sz="1200" b="1" dirty="0" err="1">
+                <a:solidFill>
+                  <a:schemeClr val="accent1"/>
+                </a:solidFill>
+                <a:latin typeface="Aptos" panose="020B0004020202020204" pitchFamily="34" charset="0"/>
+              </a:rPr>
+              <a:t>Step</a:t>
+            </a:r>
+            <a:r>
+              <a:rPr lang="fr-FR" sz="1200" b="1" dirty="0">
+                <a:solidFill>
+                  <a:schemeClr val="accent1"/>
+                </a:solidFill>
+                <a:latin typeface="Aptos" panose="020B0004020202020204" pitchFamily="34" charset="0"/>
+              </a:rPr>
+              <a:t> 1</a:t>
+            </a:r>
+          </a:p>
+        </p:txBody>
+      </p:sp>
+      <p:pic>
+        <p:nvPicPr>
+          <p:cNvPr id="8" name="Picture 2" descr="FastAPI">
+            <a:extLst>
+              <a:ext uri="{FF2B5EF4-FFF2-40B4-BE49-F238E27FC236}">
+                <a16:creationId xmlns:a16="http://schemas.microsoft.com/office/drawing/2014/main" id="{452550D2-ED72-3A3C-932E-5FA22DA61629}"/>
+              </a:ext>
+            </a:extLst>
+          </p:cNvPr>
+          <p:cNvPicPr>
+            <a:picLocks noChangeAspect="1" noChangeArrowheads="1"/>
+          </p:cNvPicPr>
+          <p:nvPr/>
+        </p:nvPicPr>
+        <p:blipFill>
+          <a:blip r:embed="rId16">
+            <a:extLst>
+              <a:ext uri="{28A0092B-C50C-407E-A947-70E740481C1C}">
+                <a14:useLocalDpi xmlns:a14="http://schemas.microsoft.com/office/drawing/2010/main" val="0"/>
+              </a:ext>
+            </a:extLst>
+          </a:blip>
+          <a:srcRect/>
+          <a:stretch>
+            <a:fillRect/>
+          </a:stretch>
+        </p:blipFill>
+        <p:spPr bwMode="auto">
+          <a:xfrm>
+            <a:off x="6236070" y="160665"/>
+            <a:ext cx="2041665" cy="735717"/>
+          </a:xfrm>
+          <a:prstGeom prst="rect">
+            <a:avLst/>
+          </a:prstGeom>
+          <a:noFill/>
+          <a:extLst>
+            <a:ext uri="{909E8E84-426E-40DD-AFC4-6F175D3DCCD1}">
+              <a14:hiddenFill xmlns:a14="http://schemas.microsoft.com/office/drawing/2010/main">
+                <a:solidFill>
+                  <a:srgbClr val="FFFFFF"/>
+                </a:solidFill>
+              </a14:hiddenFill>
+            </a:ext>
+          </a:extLst>
+        </p:spPr>
+      </p:pic>
+      <p:sp>
+        <p:nvSpPr>
+          <p:cNvPr id="12" name="ZoneTexte 11">
+            <a:extLst>
+              <a:ext uri="{FF2B5EF4-FFF2-40B4-BE49-F238E27FC236}">
+                <a16:creationId xmlns:a16="http://schemas.microsoft.com/office/drawing/2014/main" id="{5792B0CF-0355-1CF0-EDE9-9EEB86EC6D63}"/>
+              </a:ext>
+            </a:extLst>
+          </p:cNvPr>
+          <p:cNvSpPr txBox="1"/>
+          <p:nvPr/>
+        </p:nvSpPr>
+        <p:spPr>
+          <a:xfrm>
+            <a:off x="6372869" y="1416795"/>
+            <a:ext cx="921615" cy="276999"/>
+          </a:xfrm>
+          <a:prstGeom prst="rect">
+            <a:avLst/>
+          </a:prstGeom>
+          <a:noFill/>
+        </p:spPr>
+        <p:txBody>
+          <a:bodyPr wrap="square" rtlCol="0">
+            <a:spAutoFit/>
+          </a:bodyPr>
+          <a:lstStyle/>
+          <a:p>
+            <a:r>
+              <a:rPr lang="fr-FR" sz="1200" b="1" dirty="0" err="1">
+                <a:solidFill>
+                  <a:schemeClr val="accent1"/>
+                </a:solidFill>
+                <a:latin typeface="Aptos" panose="020B0004020202020204" pitchFamily="34" charset="0"/>
+              </a:rPr>
+              <a:t>Step</a:t>
+            </a:r>
+            <a:r>
+              <a:rPr lang="fr-FR" sz="1200" b="1" dirty="0">
+                <a:solidFill>
+                  <a:schemeClr val="accent1"/>
+                </a:solidFill>
+                <a:latin typeface="Aptos" panose="020B0004020202020204" pitchFamily="34" charset="0"/>
+              </a:rPr>
+              <a:t> 2</a:t>
+            </a:r>
+          </a:p>
+        </p:txBody>
+      </p:sp>
+    </p:spTree>
+    <p:extLst>
+      <p:ext uri="{BB962C8B-B14F-4D97-AF65-F5344CB8AC3E}">
+        <p14:creationId xmlns:p14="http://schemas.microsoft.com/office/powerpoint/2010/main" val="3242407568"/>
+      </p:ext>
+    </p:extLst>
+  </p:cSld>
+  <p:clrMapOvr>
+    <a:masterClrMapping/>
+  </p:clrMapOvr>
+</p:sld>
+</file>
+
+<file path=ppt/slides/slide4.xml><?xml version="1.0" encoding="utf-8"?>
 <p:sld xmlns:a="http://schemas.openxmlformats.org/drawingml/2006/main" xmlns:r="http://schemas.openxmlformats.org/officeDocument/2006/relationships" xmlns:p="http://schemas.openxmlformats.org/presentationml/2006/main">
   <p:cSld>
     <p:spTree>
